--- a/cse5825-bayesian-ml/project0/proj0_pitch_gnn.pptx
+++ b/cse5825-bayesian-ml/project0/proj0_pitch_gnn.pptx
@@ -772,7 +772,7 @@
           <a:p>
             <a:r>
               <a:rPr lang="en-US" dirty="0"/>
-              <a:t>The model has two hidden parts: a reliability variable for each edge, real or injected, and the GNN's weights. What we observe is the node texts, the edge list, which includes the injected edges, the training labels, and an LLM's rating of each edge. The key equation is Bayes' rule for each edge: a prior from the LLM's rating, treated as noisy evidence rather than truth, times a likelihood from structure, meaning how far apart the two endpoints' representations are. The GNN then weights each message by the posterior probability that its edge is real.</a:t>
+              <a:t>The core of the model is Bayes' rule, applied to every edge. The hidden question is whether the edge is real or injected. The prior comes from text: an LLM reads both nodes' texts and rates whether the link makes sense, and I treat that rating as noisy evidence rather than truth. The likelihood comes from structure: whether the two endpoints' representations agree during propagation. Multiplying them gives a posterior probability that the edge is real, with uncertainty. The GNN then weights each message by that posterior, its own weights get an approximate posterior too, and the result is node predictions with uncertainty.</a:t>
             </a:r>
             <a:endParaRPr lang="en-US" dirty="0"/>
           </a:p>
@@ -3177,7 +3177,7 @@
                 <a:ea typeface="Cambria" pitchFamily="34" charset="-122"/>
                 <a:cs typeface="Cambria" pitchFamily="34" charset="-120"/>
               </a:rPr>
-              <a:t>Approach: edge reliability as a hidden variable</a:t>
+              <a:t>Approach: Bayes’ rule for every edge</a:t>
             </a:r>
             <a:endParaRPr lang="en-US" sz="3600" dirty="0"/>
           </a:p>
@@ -3185,112 +3185,160 @@
       </p:sp>
       <p:sp>
         <p:nvSpPr>
-          <p:cNvPr id="3" name="Shape 1"/>
+          <p:cNvPr id="3" name="Text 1"/>
+          <p:cNvSpPr txBox="1"/>
+          <p:nvPr/>
+        </p:nvSpPr>
+        <p:spPr>
+          <a:xfrm>
+            <a:off x="548640" y="1143000"/>
+            <a:ext cx="11091672" cy="365760"/>
+          </a:xfrm>
+          <a:prstGeom prst="rect">
+            <a:avLst/>
+          </a:prstGeom>
+          <a:noFill/>
+          <a:ln/>
+        </p:spPr>
+        <p:txBody>
+          <a:bodyPr wrap="square" lIns="0" tIns="0" rIns="0" bIns="0" rtlCol="0" anchor="ctr"/>
+          <a:lstStyle/>
+          <a:p>
+            <a:pPr indent="0" marL="0">
+              <a:buNone/>
+            </a:pPr>
+            <a:r>
+              <a:rPr lang="en-US" sz="1600" dirty="0">
+                <a:solidFill>
+                  <a:srgbClr val="4A5568"/>
+                </a:solidFill>
+                <a:latin typeface="Calibri" pitchFamily="34" charset="0"/>
+                <a:ea typeface="Calibri" pitchFamily="34" charset="-122"/>
+                <a:cs typeface="Calibri" pitchFamily="34" charset="-120"/>
+              </a:rPr>
+              <a:t>Hidden question for each edge: is it real (</a:t>
+            </a:r>
+            <a:pPr indent="0" marL="0">
+              <a:buNone/>
+            </a:pPr>
+            <a:r>
+              <a:rPr lang="en-US" sz="1600" i="1" dirty="0">
+                <a:solidFill>
+                  <a:srgbClr val="4A5568"/>
+                </a:solidFill>
+                <a:latin typeface="Calibri" pitchFamily="34" charset="0"/>
+                <a:ea typeface="Calibri" pitchFamily="34" charset="-122"/>
+                <a:cs typeface="Calibri" pitchFamily="34" charset="-120"/>
+              </a:rPr>
+              <a:t>z</a:t>
+            </a:r>
+            <a:pPr indent="0" marL="0">
+              <a:buNone/>
+            </a:pPr>
+            <a:r>
+              <a:rPr lang="en-US" sz="1600" i="1" baseline="-40000" dirty="0">
+                <a:solidFill>
+                  <a:srgbClr val="4A5568"/>
+                </a:solidFill>
+                <a:latin typeface="Calibri" pitchFamily="34" charset="0"/>
+                <a:ea typeface="Calibri" pitchFamily="34" charset="-122"/>
+                <a:cs typeface="Calibri" pitchFamily="34" charset="-120"/>
+              </a:rPr>
+              <a:t>ij</a:t>
+            </a:r>
+            <a:pPr indent="0" marL="0">
+              <a:buNone/>
+            </a:pPr>
+            <a:r>
+              <a:rPr lang="en-US" sz="1600" dirty="0">
+                <a:solidFill>
+                  <a:srgbClr val="4A5568"/>
+                </a:solidFill>
+                <a:latin typeface="Calibri" pitchFamily="34" charset="0"/>
+                <a:ea typeface="Calibri" pitchFamily="34" charset="-122"/>
+                <a:cs typeface="Calibri" pitchFamily="34" charset="-120"/>
+              </a:rPr>
+              <a:t> = 1) or injected (</a:t>
+            </a:r>
+            <a:pPr indent="0" marL="0">
+              <a:buNone/>
+            </a:pPr>
+            <a:r>
+              <a:rPr lang="en-US" sz="1600" i="1" dirty="0">
+                <a:solidFill>
+                  <a:srgbClr val="4A5568"/>
+                </a:solidFill>
+                <a:latin typeface="Calibri" pitchFamily="34" charset="0"/>
+                <a:ea typeface="Calibri" pitchFamily="34" charset="-122"/>
+                <a:cs typeface="Calibri" pitchFamily="34" charset="-120"/>
+              </a:rPr>
+              <a:t>z</a:t>
+            </a:r>
+            <a:pPr indent="0" marL="0">
+              <a:buNone/>
+            </a:pPr>
+            <a:r>
+              <a:rPr lang="en-US" sz="1600" i="1" baseline="-40000" dirty="0">
+                <a:solidFill>
+                  <a:srgbClr val="4A5568"/>
+                </a:solidFill>
+                <a:latin typeface="Calibri" pitchFamily="34" charset="0"/>
+                <a:ea typeface="Calibri" pitchFamily="34" charset="-122"/>
+                <a:cs typeface="Calibri" pitchFamily="34" charset="-120"/>
+              </a:rPr>
+              <a:t>ij</a:t>
+            </a:r>
+            <a:pPr indent="0" marL="0">
+              <a:buNone/>
+            </a:pPr>
+            <a:r>
+              <a:rPr lang="en-US" sz="1600" dirty="0">
+                <a:solidFill>
+                  <a:srgbClr val="4A5568"/>
+                </a:solidFill>
+                <a:latin typeface="Calibri" pitchFamily="34" charset="0"/>
+                <a:ea typeface="Calibri" pitchFamily="34" charset="-122"/>
+                <a:cs typeface="Calibri" pitchFamily="34" charset="-120"/>
+              </a:rPr>
+              <a:t> = 0)?</a:t>
+            </a:r>
+            <a:endParaRPr lang="en-US" sz="1600" dirty="0"/>
+          </a:p>
+        </p:txBody>
+      </p:sp>
+      <p:sp>
+        <p:nvSpPr>
+          <p:cNvPr id="4" name="Shape 2"/>
           <p:cNvSpPr/>
           <p:nvPr/>
         </p:nvSpPr>
         <p:spPr>
           <a:xfrm>
-            <a:off x="548640" y="1417320"/>
-            <a:ext cx="4846320" cy="1371600"/>
+            <a:off x="548640" y="1737360"/>
+            <a:ext cx="3200400" cy="2606040"/>
           </a:xfrm>
           <a:prstGeom prst="roundRect">
             <a:avLst>
-              <a:gd name="adj" fmla="val 6667"/>
+              <a:gd name="adj" fmla="val 4211"/>
             </a:avLst>
           </a:prstGeom>
           <a:solidFill>
             <a:srgbClr val="FFFFFF"/>
           </a:solidFill>
-          <a:ln w="19050">
+          <a:ln w="12700">
             <a:solidFill>
-              <a:srgbClr val="4A5568"/>
+              <a:srgbClr val="FFFFFF"/>
             </a:solidFill>
-            <a:prstDash val="dash"/>
+            <a:prstDash val="solid"/>
           </a:ln>
-        </p:spPr>
-      </p:sp>
-      <p:sp>
-        <p:nvSpPr>
-          <p:cNvPr id="4" name="Text 2"/>
-          <p:cNvSpPr txBox="1"/>
-          <p:nvPr/>
-        </p:nvSpPr>
-        <p:spPr>
-          <a:xfrm>
-            <a:off x="822960" y="1554480"/>
-            <a:ext cx="4389120" cy="1097280"/>
-          </a:xfrm>
-          <a:prstGeom prst="rect">
-            <a:avLst/>
-          </a:prstGeom>
-          <a:noFill/>
-          <a:ln/>
-        </p:spPr>
-        <p:txBody>
-          <a:bodyPr wrap="square" lIns="0" tIns="0" rIns="0" bIns="0" rtlCol="0" anchor="t"/>
-          <a:lstStyle/>
-          <a:p>
-            <a:pPr indent="0" marL="0">
-              <a:spcAft>
-                <a:spcPts val="300"/>
-              </a:spcAft>
-              <a:buNone/>
-            </a:pPr>
-            <a:r>
-              <a:rPr lang="en-US" sz="1200" b="1" spc="300" kern="0" dirty="0">
-                <a:solidFill>
-                  <a:srgbClr val="B4540A"/>
-                </a:solidFill>
-                <a:latin typeface="Calibri" pitchFamily="34" charset="0"/>
-                <a:ea typeface="Calibri" pitchFamily="34" charset="-122"/>
-                <a:cs typeface="Calibri" pitchFamily="34" charset="-120"/>
-              </a:rPr>
-              <a:t>HIDDEN</a:t>
-            </a:r>
-            <a:endParaRPr lang="en-US" sz="1200" dirty="0"/>
-          </a:p>
-          <a:p>
-            <a:pPr indent="0" marL="0">
-              <a:spcAft>
-                <a:spcPts val="300"/>
-              </a:spcAft>
-              <a:buNone/>
-            </a:pPr>
-            <a:r>
-              <a:rPr lang="en-US" sz="2000" b="1" dirty="0">
-                <a:solidFill>
-                  <a:srgbClr val="14213D"/>
-                </a:solidFill>
-                <a:latin typeface="Calibri" pitchFamily="34" charset="0"/>
-                <a:ea typeface="Calibri" pitchFamily="34" charset="-122"/>
-                <a:cs typeface="Calibri" pitchFamily="34" charset="-120"/>
-              </a:rPr>
-              <a:t>Edge reliability z_ij</a:t>
-            </a:r>
-            <a:endParaRPr lang="en-US" sz="1200" dirty="0"/>
-          </a:p>
-          <a:p>
-            <a:pPr indent="0" marL="0">
-              <a:spcAft>
-                <a:spcPts val="300"/>
-              </a:spcAft>
-              <a:buNone/>
-            </a:pPr>
-            <a:r>
-              <a:rPr lang="en-US" sz="1400" dirty="0">
-                <a:solidFill>
-                  <a:srgbClr val="4A5568"/>
-                </a:solidFill>
-                <a:latin typeface="Calibri" pitchFamily="34" charset="0"/>
-                <a:ea typeface="Calibri" pitchFamily="34" charset="-122"/>
-                <a:cs typeface="Calibri" pitchFamily="34" charset="-120"/>
-              </a:rPr>
-              <a:t>Is the edge real (1) or injected (0)?</a:t>
-            </a:r>
-            <a:endParaRPr lang="en-US" sz="1200" dirty="0"/>
-          </a:p>
-        </p:txBody>
+          <a:effectLst>
+            <a:outerShdw sx="100000" sy="100000" kx="0" ky="0" algn="bl" rotWithShape="0" blurRad="76200" dist="25400" dir="5400000">
+              <a:srgbClr val="000000">
+                <a:alpha val="8000"/>
+              </a:srgbClr>
+            </a:outerShdw>
+          </a:effectLst>
+        </p:spPr>
       </p:sp>
       <p:sp>
         <p:nvSpPr>
@@ -3300,119 +3348,10 @@
         </p:nvSpPr>
         <p:spPr>
           <a:xfrm>
-            <a:off x="548640" y="3017520"/>
-            <a:ext cx="4846320" cy="1371600"/>
-          </a:xfrm>
-          <a:prstGeom prst="roundRect">
-            <a:avLst>
-              <a:gd name="adj" fmla="val 6667"/>
-            </a:avLst>
-          </a:prstGeom>
-          <a:solidFill>
-            <a:srgbClr val="FFFFFF"/>
-          </a:solidFill>
-          <a:ln w="19050">
-            <a:solidFill>
-              <a:srgbClr val="4A5568"/>
-            </a:solidFill>
-            <a:prstDash val="dash"/>
-          </a:ln>
-        </p:spPr>
-      </p:sp>
-      <p:sp>
-        <p:nvSpPr>
-          <p:cNvPr id="6" name="Text 4"/>
-          <p:cNvSpPr txBox="1"/>
-          <p:nvPr/>
-        </p:nvSpPr>
-        <p:spPr>
-          <a:xfrm>
-            <a:off x="822960" y="3154680"/>
-            <a:ext cx="4389120" cy="1097280"/>
-          </a:xfrm>
-          <a:prstGeom prst="rect">
-            <a:avLst/>
-          </a:prstGeom>
-          <a:noFill/>
-          <a:ln/>
-        </p:spPr>
-        <p:txBody>
-          <a:bodyPr wrap="square" lIns="0" tIns="0" rIns="0" bIns="0" rtlCol="0" anchor="t"/>
-          <a:lstStyle/>
-          <a:p>
-            <a:pPr indent="0" marL="0">
-              <a:spcAft>
-                <a:spcPts val="300"/>
-              </a:spcAft>
-              <a:buNone/>
-            </a:pPr>
-            <a:r>
-              <a:rPr lang="en-US" sz="1200" b="1" spc="300" kern="0" dirty="0">
-                <a:solidFill>
-                  <a:srgbClr val="B4540A"/>
-                </a:solidFill>
-                <a:latin typeface="Calibri" pitchFamily="34" charset="0"/>
-                <a:ea typeface="Calibri" pitchFamily="34" charset="-122"/>
-                <a:cs typeface="Calibri" pitchFamily="34" charset="-120"/>
-              </a:rPr>
-              <a:t>HIDDEN</a:t>
-            </a:r>
-            <a:endParaRPr lang="en-US" sz="1200" dirty="0"/>
-          </a:p>
-          <a:p>
-            <a:pPr indent="0" marL="0">
-              <a:spcAft>
-                <a:spcPts val="300"/>
-              </a:spcAft>
-              <a:buNone/>
-            </a:pPr>
-            <a:r>
-              <a:rPr lang="en-US" sz="2000" b="1" dirty="0">
-                <a:solidFill>
-                  <a:srgbClr val="14213D"/>
-                </a:solidFill>
-                <a:latin typeface="Calibri" pitchFamily="34" charset="0"/>
-                <a:ea typeface="Calibri" pitchFamily="34" charset="-122"/>
-                <a:cs typeface="Calibri" pitchFamily="34" charset="-120"/>
-              </a:rPr>
-              <a:t>GNN weights W</a:t>
-            </a:r>
-            <a:endParaRPr lang="en-US" sz="1200" dirty="0"/>
-          </a:p>
-          <a:p>
-            <a:pPr indent="0" marL="0">
-              <a:spcAft>
-                <a:spcPts val="300"/>
-              </a:spcAft>
-              <a:buNone/>
-            </a:pPr>
-            <a:r>
-              <a:rPr lang="en-US" sz="1400" dirty="0">
-                <a:solidFill>
-                  <a:srgbClr val="4A5568"/>
-                </a:solidFill>
-                <a:latin typeface="Calibri" pitchFamily="34" charset="0"/>
-                <a:ea typeface="Calibri" pitchFamily="34" charset="-122"/>
-                <a:cs typeface="Calibri" pitchFamily="34" charset="-120"/>
-              </a:rPr>
-              <a:t>Approximate posterior: MC dropout, ensembles, VI</a:t>
-            </a:r>
-            <a:endParaRPr lang="en-US" sz="1200" dirty="0"/>
-          </a:p>
-        </p:txBody>
-      </p:sp>
-      <p:sp>
-        <p:nvSpPr>
-          <p:cNvPr id="7" name="Shape 5"/>
-          <p:cNvSpPr/>
-          <p:nvPr/>
-        </p:nvSpPr>
-        <p:spPr>
-          <a:xfrm>
-            <a:off x="5623560" y="2514600"/>
-            <a:ext cx="914400" cy="548640"/>
-          </a:xfrm>
-          <a:prstGeom prst="rightArrow">
+            <a:off x="822960" y="2011680"/>
+            <a:ext cx="548640" cy="548640"/>
+          </a:xfrm>
+          <a:prstGeom prst="ellipse">
             <a:avLst/>
           </a:prstGeom>
           <a:solidFill>
@@ -3426,20 +3365,607 @@
           </a:ln>
         </p:spPr>
       </p:sp>
-      <p:sp>
-        <p:nvSpPr>
-          <p:cNvPr id="8" name="Shape 6"/>
+      <p:pic>
+        <p:nvPicPr>
+          <p:cNvPr id="6" name="Image 0" descr="preencoded.png">    </p:cNvPr>
+          <p:cNvPicPr>
+            <a:picLocks noChangeAspect="1"/>
+          </p:cNvPicPr>
+          <p:nvPr/>
+        </p:nvPicPr>
+        <p:blipFill>
+          <a:blip r:embed="rId1"/>
+          <a:stretch>
+            <a:fillRect/>
+          </a:stretch>
+        </p:blipFill>
+        <p:spPr>
+          <a:xfrm>
+            <a:off x="960120" y="2148840"/>
+            <a:ext cx="274320" cy="274320"/>
+          </a:xfrm>
+          <a:prstGeom prst="rect">
+            <a:avLst/>
+          </a:prstGeom>
+        </p:spPr>
+      </p:pic>
+      <p:sp>
+        <p:nvSpPr>
+          <p:cNvPr id="7" name="Text 4"/>
+          <p:cNvSpPr txBox="1"/>
+          <p:nvPr/>
+        </p:nvSpPr>
+        <p:spPr>
+          <a:xfrm>
+            <a:off x="1508760" y="2011680"/>
+            <a:ext cx="2057400" cy="548640"/>
+          </a:xfrm>
+          <a:prstGeom prst="rect">
+            <a:avLst/>
+          </a:prstGeom>
+          <a:noFill/>
+          <a:ln/>
+        </p:spPr>
+        <p:txBody>
+          <a:bodyPr wrap="square" lIns="0" tIns="0" rIns="0" bIns="0" rtlCol="0" anchor="ctr"/>
+          <a:lstStyle/>
+          <a:p>
+            <a:pPr indent="0" marL="0">
+              <a:buNone/>
+            </a:pPr>
+            <a:r>
+              <a:rPr lang="en-US" sz="1200" b="1" spc="150" kern="0" dirty="0">
+                <a:solidFill>
+                  <a:srgbClr val="B4540A"/>
+                </a:solidFill>
+                <a:latin typeface="Calibri" pitchFamily="34" charset="0"/>
+                <a:ea typeface="Calibri" pitchFamily="34" charset="-122"/>
+                <a:cs typeface="Calibri" pitchFamily="34" charset="-120"/>
+              </a:rPr>
+              <a:t>PRIOR · TEXT</a:t>
+            </a:r>
+            <a:endParaRPr lang="en-US" sz="1200" dirty="0"/>
+          </a:p>
+        </p:txBody>
+      </p:sp>
+      <p:sp>
+        <p:nvSpPr>
+          <p:cNvPr id="8" name="Text 5"/>
+          <p:cNvSpPr txBox="1"/>
+          <p:nvPr/>
+        </p:nvSpPr>
+        <p:spPr>
+          <a:xfrm>
+            <a:off x="822960" y="2697480"/>
+            <a:ext cx="2651760" cy="457200"/>
+          </a:xfrm>
+          <a:prstGeom prst="rect">
+            <a:avLst/>
+          </a:prstGeom>
+          <a:noFill/>
+          <a:ln/>
+        </p:spPr>
+        <p:txBody>
+          <a:bodyPr wrap="square" lIns="0" tIns="0" rIns="0" bIns="0" rtlCol="0" anchor="ctr"/>
+          <a:lstStyle/>
+          <a:p>
+            <a:pPr indent="0" marL="0">
+              <a:buNone/>
+            </a:pPr>
+            <a:r>
+              <a:rPr lang="en-US" sz="2000" dirty="0">
+                <a:solidFill>
+                  <a:srgbClr val="14213D"/>
+                </a:solidFill>
+                <a:latin typeface="Cambria Math" pitchFamily="34" charset="0"/>
+                <a:ea typeface="Cambria Math" pitchFamily="34" charset="-122"/>
+                <a:cs typeface="Cambria Math" pitchFamily="34" charset="-120"/>
+              </a:rPr>
+              <a:t>p(</a:t>
+            </a:r>
+            <a:pPr indent="0" marL="0">
+              <a:buNone/>
+            </a:pPr>
+            <a:r>
+              <a:rPr lang="en-US" sz="2000" i="1" dirty="0">
+                <a:solidFill>
+                  <a:srgbClr val="14213D"/>
+                </a:solidFill>
+                <a:latin typeface="Cambria Math" pitchFamily="34" charset="0"/>
+                <a:ea typeface="Cambria Math" pitchFamily="34" charset="-122"/>
+                <a:cs typeface="Cambria Math" pitchFamily="34" charset="-120"/>
+              </a:rPr>
+              <a:t>z</a:t>
+            </a:r>
+            <a:pPr indent="0" marL="0">
+              <a:buNone/>
+            </a:pPr>
+            <a:r>
+              <a:rPr lang="en-US" sz="2000" i="1" baseline="-40000" dirty="0">
+                <a:solidFill>
+                  <a:srgbClr val="14213D"/>
+                </a:solidFill>
+                <a:latin typeface="Cambria Math" pitchFamily="34" charset="0"/>
+                <a:ea typeface="Cambria Math" pitchFamily="34" charset="-122"/>
+                <a:cs typeface="Cambria Math" pitchFamily="34" charset="-120"/>
+              </a:rPr>
+              <a:t>ij</a:t>
+            </a:r>
+            <a:pPr indent="0" marL="0">
+              <a:buNone/>
+            </a:pPr>
+            <a:r>
+              <a:rPr lang="en-US" sz="2000" dirty="0">
+                <a:solidFill>
+                  <a:srgbClr val="14213D"/>
+                </a:solidFill>
+                <a:latin typeface="Cambria Math" pitchFamily="34" charset="0"/>
+                <a:ea typeface="Cambria Math" pitchFamily="34" charset="-122"/>
+                <a:cs typeface="Cambria Math" pitchFamily="34" charset="-120"/>
+              </a:rPr>
+              <a:t> = 1 | </a:t>
+            </a:r>
+            <a:pPr indent="0" marL="0">
+              <a:buNone/>
+            </a:pPr>
+            <a:r>
+              <a:rPr lang="en-US" sz="2000" i="1" dirty="0">
+                <a:solidFill>
+                  <a:srgbClr val="14213D"/>
+                </a:solidFill>
+                <a:latin typeface="Cambria Math" pitchFamily="34" charset="0"/>
+                <a:ea typeface="Cambria Math" pitchFamily="34" charset="-122"/>
+                <a:cs typeface="Cambria Math" pitchFamily="34" charset="-120"/>
+              </a:rPr>
+              <a:t>s</a:t>
+            </a:r>
+            <a:pPr indent="0" marL="0">
+              <a:buNone/>
+            </a:pPr>
+            <a:r>
+              <a:rPr lang="en-US" sz="2000" i="1" baseline="-40000" dirty="0">
+                <a:solidFill>
+                  <a:srgbClr val="14213D"/>
+                </a:solidFill>
+                <a:latin typeface="Cambria Math" pitchFamily="34" charset="0"/>
+                <a:ea typeface="Cambria Math" pitchFamily="34" charset="-122"/>
+                <a:cs typeface="Cambria Math" pitchFamily="34" charset="-120"/>
+              </a:rPr>
+              <a:t>ij</a:t>
+            </a:r>
+            <a:pPr indent="0" marL="0">
+              <a:buNone/>
+            </a:pPr>
+            <a:r>
+              <a:rPr lang="en-US" sz="2000" dirty="0">
+                <a:solidFill>
+                  <a:srgbClr val="14213D"/>
+                </a:solidFill>
+                <a:latin typeface="Cambria Math" pitchFamily="34" charset="0"/>
+                <a:ea typeface="Cambria Math" pitchFamily="34" charset="-122"/>
+                <a:cs typeface="Cambria Math" pitchFamily="34" charset="-120"/>
+              </a:rPr>
+              <a:t>)</a:t>
+            </a:r>
+            <a:endParaRPr lang="en-US" sz="2000" dirty="0"/>
+          </a:p>
+        </p:txBody>
+      </p:sp>
+      <p:sp>
+        <p:nvSpPr>
+          <p:cNvPr id="9" name="Text 6"/>
+          <p:cNvSpPr txBox="1"/>
+          <p:nvPr/>
+        </p:nvSpPr>
+        <p:spPr>
+          <a:xfrm>
+            <a:off x="822960" y="3246120"/>
+            <a:ext cx="2651760" cy="960120"/>
+          </a:xfrm>
+          <a:prstGeom prst="rect">
+            <a:avLst/>
+          </a:prstGeom>
+          <a:noFill/>
+          <a:ln/>
+        </p:spPr>
+        <p:txBody>
+          <a:bodyPr wrap="square" lIns="0" tIns="0" rIns="0" bIns="0" rtlCol="0" anchor="t"/>
+          <a:lstStyle/>
+          <a:p>
+            <a:pPr indent="0" marL="0">
+              <a:buNone/>
+            </a:pPr>
+            <a:r>
+              <a:rPr lang="en-US" sz="1400" dirty="0">
+                <a:solidFill>
+                  <a:srgbClr val="4A5568"/>
+                </a:solidFill>
+                <a:latin typeface="Calibri" pitchFamily="34" charset="0"/>
+                <a:ea typeface="Calibri" pitchFamily="34" charset="-122"/>
+                <a:cs typeface="Calibri" pitchFamily="34" charset="-120"/>
+              </a:rPr>
+              <a:t>An LLM reads both nodes’ texts and rates whether the link makes sense. Treated as noisy evidence.</a:t>
+            </a:r>
+            <a:endParaRPr lang="en-US" sz="1400" dirty="0"/>
+          </a:p>
+        </p:txBody>
+      </p:sp>
+      <p:sp>
+        <p:nvSpPr>
+          <p:cNvPr id="10" name="Text 7"/>
+          <p:cNvSpPr txBox="1"/>
+          <p:nvPr/>
+        </p:nvSpPr>
+        <p:spPr>
+          <a:xfrm>
+            <a:off x="3749040" y="1737360"/>
+            <a:ext cx="745236" cy="2606040"/>
+          </a:xfrm>
+          <a:prstGeom prst="rect">
+            <a:avLst/>
+          </a:prstGeom>
+          <a:noFill/>
+          <a:ln/>
+        </p:spPr>
+        <p:txBody>
+          <a:bodyPr wrap="square" lIns="0" tIns="0" rIns="0" bIns="0" rtlCol="0" anchor="ctr"/>
+          <a:lstStyle/>
+          <a:p>
+            <a:pPr algn="ctr" indent="0" marL="0">
+              <a:buNone/>
+            </a:pPr>
+            <a:r>
+              <a:rPr lang="en-US" sz="4000" b="1" dirty="0">
+                <a:solidFill>
+                  <a:srgbClr val="B4540A"/>
+                </a:solidFill>
+                <a:latin typeface="Cambria Math" pitchFamily="34" charset="0"/>
+                <a:ea typeface="Cambria Math" pitchFamily="34" charset="-122"/>
+                <a:cs typeface="Cambria Math" pitchFamily="34" charset="-120"/>
+              </a:rPr>
+              <a:t>×</a:t>
+            </a:r>
+            <a:endParaRPr lang="en-US" sz="4000" dirty="0"/>
+          </a:p>
+        </p:txBody>
+      </p:sp>
+      <p:sp>
+        <p:nvSpPr>
+          <p:cNvPr id="11" name="Shape 8"/>
           <p:cNvSpPr/>
           <p:nvPr/>
         </p:nvSpPr>
         <p:spPr>
           <a:xfrm>
-            <a:off x="6766560" y="2011680"/>
-            <a:ext cx="4873752" cy="1554480"/>
+            <a:off x="4494276" y="1737360"/>
+            <a:ext cx="3200400" cy="2606040"/>
           </a:xfrm>
           <a:prstGeom prst="roundRect">
             <a:avLst>
-              <a:gd name="adj" fmla="val 5882"/>
+              <a:gd name="adj" fmla="val 4211"/>
+            </a:avLst>
+          </a:prstGeom>
+          <a:solidFill>
+            <a:srgbClr val="FFFFFF"/>
+          </a:solidFill>
+          <a:ln w="12700">
+            <a:solidFill>
+              <a:srgbClr val="FFFFFF"/>
+            </a:solidFill>
+            <a:prstDash val="solid"/>
+          </a:ln>
+          <a:effectLst>
+            <a:outerShdw sx="100000" sy="100000" kx="0" ky="0" algn="bl" rotWithShape="0" blurRad="76200" dist="25400" dir="5400000">
+              <a:srgbClr val="000000">
+                <a:alpha val="8000"/>
+              </a:srgbClr>
+            </a:outerShdw>
+          </a:effectLst>
+        </p:spPr>
+      </p:sp>
+      <p:sp>
+        <p:nvSpPr>
+          <p:cNvPr id="12" name="Shape 9"/>
+          <p:cNvSpPr/>
+          <p:nvPr/>
+        </p:nvSpPr>
+        <p:spPr>
+          <a:xfrm>
+            <a:off x="4768596" y="2011680"/>
+            <a:ext cx="548640" cy="548640"/>
+          </a:xfrm>
+          <a:prstGeom prst="ellipse">
+            <a:avLst/>
+          </a:prstGeom>
+          <a:solidFill>
+            <a:srgbClr val="B4540A"/>
+          </a:solidFill>
+          <a:ln w="12700">
+            <a:solidFill>
+              <a:srgbClr val="B4540A"/>
+            </a:solidFill>
+            <a:prstDash val="solid"/>
+          </a:ln>
+        </p:spPr>
+      </p:sp>
+      <p:pic>
+        <p:nvPicPr>
+          <p:cNvPr id="13" name="Image 1" descr="preencoded.png">    </p:cNvPr>
+          <p:cNvPicPr>
+            <a:picLocks noChangeAspect="1"/>
+          </p:cNvPicPr>
+          <p:nvPr/>
+        </p:nvPicPr>
+        <p:blipFill>
+          <a:blip r:embed="rId2"/>
+          <a:stretch>
+            <a:fillRect/>
+          </a:stretch>
+        </p:blipFill>
+        <p:spPr>
+          <a:xfrm>
+            <a:off x="4905756" y="2148840"/>
+            <a:ext cx="274320" cy="274320"/>
+          </a:xfrm>
+          <a:prstGeom prst="rect">
+            <a:avLst/>
+          </a:prstGeom>
+        </p:spPr>
+      </p:pic>
+      <p:sp>
+        <p:nvSpPr>
+          <p:cNvPr id="14" name="Text 10"/>
+          <p:cNvSpPr txBox="1"/>
+          <p:nvPr/>
+        </p:nvSpPr>
+        <p:spPr>
+          <a:xfrm>
+            <a:off x="5454396" y="2011680"/>
+            <a:ext cx="2057400" cy="548640"/>
+          </a:xfrm>
+          <a:prstGeom prst="rect">
+            <a:avLst/>
+          </a:prstGeom>
+          <a:noFill/>
+          <a:ln/>
+        </p:spPr>
+        <p:txBody>
+          <a:bodyPr wrap="square" lIns="0" tIns="0" rIns="0" bIns="0" rtlCol="0" anchor="ctr"/>
+          <a:lstStyle/>
+          <a:p>
+            <a:pPr indent="0" marL="0">
+              <a:buNone/>
+            </a:pPr>
+            <a:r>
+              <a:rPr lang="en-US" sz="1200" b="1" spc="150" kern="0" dirty="0">
+                <a:solidFill>
+                  <a:srgbClr val="B4540A"/>
+                </a:solidFill>
+                <a:latin typeface="Calibri" pitchFamily="34" charset="0"/>
+                <a:ea typeface="Calibri" pitchFamily="34" charset="-122"/>
+                <a:cs typeface="Calibri" pitchFamily="34" charset="-120"/>
+              </a:rPr>
+              <a:t>LIKELIHOOD · GRAPH</a:t>
+            </a:r>
+            <a:endParaRPr lang="en-US" sz="1200" dirty="0"/>
+          </a:p>
+        </p:txBody>
+      </p:sp>
+      <p:sp>
+        <p:nvSpPr>
+          <p:cNvPr id="15" name="Text 11"/>
+          <p:cNvSpPr txBox="1"/>
+          <p:nvPr/>
+        </p:nvSpPr>
+        <p:spPr>
+          <a:xfrm>
+            <a:off x="4768596" y="2697480"/>
+            <a:ext cx="2651760" cy="457200"/>
+          </a:xfrm>
+          <a:prstGeom prst="rect">
+            <a:avLst/>
+          </a:prstGeom>
+          <a:noFill/>
+          <a:ln/>
+        </p:spPr>
+        <p:txBody>
+          <a:bodyPr wrap="square" lIns="0" tIns="0" rIns="0" bIns="0" rtlCol="0" anchor="ctr"/>
+          <a:lstStyle/>
+          <a:p>
+            <a:pPr indent="0" marL="0">
+              <a:buNone/>
+            </a:pPr>
+            <a:r>
+              <a:rPr lang="en-US" sz="2000" dirty="0">
+                <a:solidFill>
+                  <a:srgbClr val="14213D"/>
+                </a:solidFill>
+                <a:latin typeface="Cambria Math" pitchFamily="34" charset="0"/>
+                <a:ea typeface="Cambria Math" pitchFamily="34" charset="-122"/>
+                <a:cs typeface="Cambria Math" pitchFamily="34" charset="-120"/>
+              </a:rPr>
+              <a:t>p(</a:t>
+            </a:r>
+            <a:pPr indent="0" marL="0">
+              <a:buNone/>
+            </a:pPr>
+            <a:r>
+              <a:rPr lang="en-US" sz="2000" i="1" dirty="0">
+                <a:solidFill>
+                  <a:srgbClr val="14213D"/>
+                </a:solidFill>
+                <a:latin typeface="Cambria Math" pitchFamily="34" charset="0"/>
+                <a:ea typeface="Cambria Math" pitchFamily="34" charset="-122"/>
+                <a:cs typeface="Cambria Math" pitchFamily="34" charset="-120"/>
+              </a:rPr>
+              <a:t>d</a:t>
+            </a:r>
+            <a:pPr indent="0" marL="0">
+              <a:buNone/>
+            </a:pPr>
+            <a:r>
+              <a:rPr lang="en-US" sz="2000" i="1" baseline="-40000" dirty="0">
+                <a:solidFill>
+                  <a:srgbClr val="14213D"/>
+                </a:solidFill>
+                <a:latin typeface="Cambria Math" pitchFamily="34" charset="0"/>
+                <a:ea typeface="Cambria Math" pitchFamily="34" charset="-122"/>
+                <a:cs typeface="Cambria Math" pitchFamily="34" charset="-120"/>
+              </a:rPr>
+              <a:t>ij</a:t>
+            </a:r>
+            <a:pPr indent="0" marL="0">
+              <a:buNone/>
+            </a:pPr>
+            <a:r>
+              <a:rPr lang="en-US" sz="2000" dirty="0">
+                <a:solidFill>
+                  <a:srgbClr val="14213D"/>
+                </a:solidFill>
+                <a:latin typeface="Cambria Math" pitchFamily="34" charset="0"/>
+                <a:ea typeface="Cambria Math" pitchFamily="34" charset="-122"/>
+                <a:cs typeface="Cambria Math" pitchFamily="34" charset="-120"/>
+              </a:rPr>
+              <a:t> | </a:t>
+            </a:r>
+            <a:pPr indent="0" marL="0">
+              <a:buNone/>
+            </a:pPr>
+            <a:r>
+              <a:rPr lang="en-US" sz="2000" i="1" dirty="0">
+                <a:solidFill>
+                  <a:srgbClr val="14213D"/>
+                </a:solidFill>
+                <a:latin typeface="Cambria Math" pitchFamily="34" charset="0"/>
+                <a:ea typeface="Cambria Math" pitchFamily="34" charset="-122"/>
+                <a:cs typeface="Cambria Math" pitchFamily="34" charset="-120"/>
+              </a:rPr>
+              <a:t>z</a:t>
+            </a:r>
+            <a:pPr indent="0" marL="0">
+              <a:buNone/>
+            </a:pPr>
+            <a:r>
+              <a:rPr lang="en-US" sz="2000" i="1" baseline="-40000" dirty="0">
+                <a:solidFill>
+                  <a:srgbClr val="14213D"/>
+                </a:solidFill>
+                <a:latin typeface="Cambria Math" pitchFamily="34" charset="0"/>
+                <a:ea typeface="Cambria Math" pitchFamily="34" charset="-122"/>
+                <a:cs typeface="Cambria Math" pitchFamily="34" charset="-120"/>
+              </a:rPr>
+              <a:t>ij</a:t>
+            </a:r>
+            <a:pPr indent="0" marL="0">
+              <a:buNone/>
+            </a:pPr>
+            <a:r>
+              <a:rPr lang="en-US" sz="2000" dirty="0">
+                <a:solidFill>
+                  <a:srgbClr val="14213D"/>
+                </a:solidFill>
+                <a:latin typeface="Cambria Math" pitchFamily="34" charset="0"/>
+                <a:ea typeface="Cambria Math" pitchFamily="34" charset="-122"/>
+                <a:cs typeface="Cambria Math" pitchFamily="34" charset="-120"/>
+              </a:rPr>
+              <a:t>)</a:t>
+            </a:r>
+            <a:endParaRPr lang="en-US" sz="2000" dirty="0"/>
+          </a:p>
+        </p:txBody>
+      </p:sp>
+      <p:sp>
+        <p:nvSpPr>
+          <p:cNvPr id="16" name="Text 12"/>
+          <p:cNvSpPr txBox="1"/>
+          <p:nvPr/>
+        </p:nvSpPr>
+        <p:spPr>
+          <a:xfrm>
+            <a:off x="4768596" y="3246120"/>
+            <a:ext cx="2651760" cy="960120"/>
+          </a:xfrm>
+          <a:prstGeom prst="rect">
+            <a:avLst/>
+          </a:prstGeom>
+          <a:noFill/>
+          <a:ln/>
+        </p:spPr>
+        <p:txBody>
+          <a:bodyPr wrap="square" lIns="0" tIns="0" rIns="0" bIns="0" rtlCol="0" anchor="t"/>
+          <a:lstStyle/>
+          <a:p>
+            <a:pPr indent="0" marL="0">
+              <a:buNone/>
+            </a:pPr>
+            <a:r>
+              <a:rPr lang="en-US" sz="1400" dirty="0">
+                <a:solidFill>
+                  <a:srgbClr val="4A5568"/>
+                </a:solidFill>
+                <a:latin typeface="Calibri" pitchFamily="34" charset="0"/>
+                <a:ea typeface="Calibri" pitchFamily="34" charset="-122"/>
+                <a:cs typeface="Calibri" pitchFamily="34" charset="-120"/>
+              </a:rPr>
+              <a:t>Do the endpoints’ representations agree during propagation? Fake edges tend to join mismatched nodes.</a:t>
+            </a:r>
+            <a:endParaRPr lang="en-US" sz="1400" dirty="0"/>
+          </a:p>
+        </p:txBody>
+      </p:sp>
+      <p:sp>
+        <p:nvSpPr>
+          <p:cNvPr id="17" name="Text 13"/>
+          <p:cNvSpPr txBox="1"/>
+          <p:nvPr/>
+        </p:nvSpPr>
+        <p:spPr>
+          <a:xfrm>
+            <a:off x="7694676" y="1737360"/>
+            <a:ext cx="745236" cy="2606040"/>
+          </a:xfrm>
+          <a:prstGeom prst="rect">
+            <a:avLst/>
+          </a:prstGeom>
+          <a:noFill/>
+          <a:ln/>
+        </p:spPr>
+        <p:txBody>
+          <a:bodyPr wrap="square" lIns="0" tIns="0" rIns="0" bIns="0" rtlCol="0" anchor="ctr"/>
+          <a:lstStyle/>
+          <a:p>
+            <a:pPr algn="ctr" indent="0" marL="0">
+              <a:buNone/>
+            </a:pPr>
+            <a:r>
+              <a:rPr lang="en-US" sz="4000" b="1" dirty="0">
+                <a:solidFill>
+                  <a:srgbClr val="B4540A"/>
+                </a:solidFill>
+                <a:latin typeface="Cambria Math" pitchFamily="34" charset="0"/>
+                <a:ea typeface="Cambria Math" pitchFamily="34" charset="-122"/>
+                <a:cs typeface="Cambria Math" pitchFamily="34" charset="-120"/>
+              </a:rPr>
+              <a:t>∝</a:t>
+            </a:r>
+            <a:endParaRPr lang="en-US" sz="4000" dirty="0"/>
+          </a:p>
+        </p:txBody>
+      </p:sp>
+      <p:sp>
+        <p:nvSpPr>
+          <p:cNvPr id="18" name="Shape 14"/>
+          <p:cNvSpPr/>
+          <p:nvPr/>
+        </p:nvSpPr>
+        <p:spPr>
+          <a:xfrm>
+            <a:off x="8439912" y="1737360"/>
+            <a:ext cx="3200400" cy="2606040"/>
+          </a:xfrm>
+          <a:prstGeom prst="roundRect">
+            <a:avLst>
+              <a:gd name="adj" fmla="val 4211"/>
             </a:avLst>
           </a:prstGeom>
           <a:solidFill>
@@ -3451,18 +3977,278 @@
             </a:solidFill>
             <a:prstDash val="solid"/>
           </a:ln>
-        </p:spPr>
-      </p:sp>
-      <p:sp>
-        <p:nvSpPr>
-          <p:cNvPr id="9" name="Text 7"/>
-          <p:cNvSpPr txBox="1"/>
-          <p:nvPr/>
-        </p:nvSpPr>
-        <p:spPr>
-          <a:xfrm>
-            <a:off x="7040880" y="2194560"/>
-            <a:ext cx="4389120" cy="1234440"/>
+          <a:effectLst>
+            <a:outerShdw sx="100000" sy="100000" kx="0" ky="0" algn="bl" rotWithShape="0" blurRad="76200" dist="25400" dir="5400000">
+              <a:srgbClr val="000000">
+                <a:alpha val="8000"/>
+              </a:srgbClr>
+            </a:outerShdw>
+          </a:effectLst>
+        </p:spPr>
+      </p:sp>
+      <p:sp>
+        <p:nvSpPr>
+          <p:cNvPr id="19" name="Shape 15"/>
+          <p:cNvSpPr/>
+          <p:nvPr/>
+        </p:nvSpPr>
+        <p:spPr>
+          <a:xfrm>
+            <a:off x="8714232" y="2011680"/>
+            <a:ext cx="548640" cy="548640"/>
+          </a:xfrm>
+          <a:prstGeom prst="ellipse">
+            <a:avLst/>
+          </a:prstGeom>
+          <a:solidFill>
+            <a:srgbClr val="B4540A"/>
+          </a:solidFill>
+          <a:ln w="12700">
+            <a:solidFill>
+              <a:srgbClr val="B4540A"/>
+            </a:solidFill>
+            <a:prstDash val="solid"/>
+          </a:ln>
+        </p:spPr>
+      </p:sp>
+      <p:pic>
+        <p:nvPicPr>
+          <p:cNvPr id="20" name="Image 2" descr="preencoded.png">    </p:cNvPr>
+          <p:cNvPicPr>
+            <a:picLocks noChangeAspect="1"/>
+          </p:cNvPicPr>
+          <p:nvPr/>
+        </p:nvPicPr>
+        <p:blipFill>
+          <a:blip r:embed="rId3"/>
+          <a:stretch>
+            <a:fillRect/>
+          </a:stretch>
+        </p:blipFill>
+        <p:spPr>
+          <a:xfrm>
+            <a:off x="8851392" y="2148840"/>
+            <a:ext cx="274320" cy="274320"/>
+          </a:xfrm>
+          <a:prstGeom prst="rect">
+            <a:avLst/>
+          </a:prstGeom>
+        </p:spPr>
+      </p:pic>
+      <p:sp>
+        <p:nvSpPr>
+          <p:cNvPr id="21" name="Text 16"/>
+          <p:cNvSpPr txBox="1"/>
+          <p:nvPr/>
+        </p:nvSpPr>
+        <p:spPr>
+          <a:xfrm>
+            <a:off x="9400032" y="2011680"/>
+            <a:ext cx="2057400" cy="548640"/>
+          </a:xfrm>
+          <a:prstGeom prst="rect">
+            <a:avLst/>
+          </a:prstGeom>
+          <a:noFill/>
+          <a:ln/>
+        </p:spPr>
+        <p:txBody>
+          <a:bodyPr wrap="square" lIns="0" tIns="0" rIns="0" bIns="0" rtlCol="0" anchor="ctr"/>
+          <a:lstStyle/>
+          <a:p>
+            <a:pPr indent="0" marL="0">
+              <a:buNone/>
+            </a:pPr>
+            <a:r>
+              <a:rPr lang="en-US" sz="1200" b="1" spc="150" kern="0" dirty="0">
+                <a:solidFill>
+                  <a:srgbClr val="F2A65A"/>
+                </a:solidFill>
+                <a:latin typeface="Calibri" pitchFamily="34" charset="0"/>
+                <a:ea typeface="Calibri" pitchFamily="34" charset="-122"/>
+                <a:cs typeface="Calibri" pitchFamily="34" charset="-120"/>
+              </a:rPr>
+              <a:t>POSTERIOR</a:t>
+            </a:r>
+            <a:endParaRPr lang="en-US" sz="1200" dirty="0"/>
+          </a:p>
+        </p:txBody>
+      </p:sp>
+      <p:sp>
+        <p:nvSpPr>
+          <p:cNvPr id="22" name="Text 17"/>
+          <p:cNvSpPr txBox="1"/>
+          <p:nvPr/>
+        </p:nvSpPr>
+        <p:spPr>
+          <a:xfrm>
+            <a:off x="8714232" y="2697480"/>
+            <a:ext cx="2651760" cy="457200"/>
+          </a:xfrm>
+          <a:prstGeom prst="rect">
+            <a:avLst/>
+          </a:prstGeom>
+          <a:noFill/>
+          <a:ln/>
+        </p:spPr>
+        <p:txBody>
+          <a:bodyPr wrap="square" lIns="0" tIns="0" rIns="0" bIns="0" rtlCol="0" anchor="ctr"/>
+          <a:lstStyle/>
+          <a:p>
+            <a:pPr indent="0" marL="0">
+              <a:buNone/>
+            </a:pPr>
+            <a:r>
+              <a:rPr lang="en-US" sz="2000" dirty="0">
+                <a:solidFill>
+                  <a:srgbClr val="FFFFFF"/>
+                </a:solidFill>
+                <a:latin typeface="Cambria Math" pitchFamily="34" charset="0"/>
+                <a:ea typeface="Cambria Math" pitchFamily="34" charset="-122"/>
+                <a:cs typeface="Cambria Math" pitchFamily="34" charset="-120"/>
+              </a:rPr>
+              <a:t>p(</a:t>
+            </a:r>
+            <a:pPr indent="0" marL="0">
+              <a:buNone/>
+            </a:pPr>
+            <a:r>
+              <a:rPr lang="en-US" sz="2000" i="1" dirty="0">
+                <a:solidFill>
+                  <a:srgbClr val="FFFFFF"/>
+                </a:solidFill>
+                <a:latin typeface="Cambria Math" pitchFamily="34" charset="0"/>
+                <a:ea typeface="Cambria Math" pitchFamily="34" charset="-122"/>
+                <a:cs typeface="Cambria Math" pitchFamily="34" charset="-120"/>
+              </a:rPr>
+              <a:t>z</a:t>
+            </a:r>
+            <a:pPr indent="0" marL="0">
+              <a:buNone/>
+            </a:pPr>
+            <a:r>
+              <a:rPr lang="en-US" sz="2000" i="1" baseline="-40000" dirty="0">
+                <a:solidFill>
+                  <a:srgbClr val="FFFFFF"/>
+                </a:solidFill>
+                <a:latin typeface="Cambria Math" pitchFamily="34" charset="0"/>
+                <a:ea typeface="Cambria Math" pitchFamily="34" charset="-122"/>
+                <a:cs typeface="Cambria Math" pitchFamily="34" charset="-120"/>
+              </a:rPr>
+              <a:t>ij</a:t>
+            </a:r>
+            <a:pPr indent="0" marL="0">
+              <a:buNone/>
+            </a:pPr>
+            <a:r>
+              <a:rPr lang="en-US" sz="2000" dirty="0">
+                <a:solidFill>
+                  <a:srgbClr val="FFFFFF"/>
+                </a:solidFill>
+                <a:latin typeface="Cambria Math" pitchFamily="34" charset="0"/>
+                <a:ea typeface="Cambria Math" pitchFamily="34" charset="-122"/>
+                <a:cs typeface="Cambria Math" pitchFamily="34" charset="-120"/>
+              </a:rPr>
+              <a:t> = 1 | </a:t>
+            </a:r>
+            <a:pPr indent="0" marL="0">
+              <a:buNone/>
+            </a:pPr>
+            <a:r>
+              <a:rPr lang="en-US" sz="2000" i="1" dirty="0">
+                <a:solidFill>
+                  <a:srgbClr val="FFFFFF"/>
+                </a:solidFill>
+                <a:latin typeface="Cambria Math" pitchFamily="34" charset="0"/>
+                <a:ea typeface="Cambria Math" pitchFamily="34" charset="-122"/>
+                <a:cs typeface="Cambria Math" pitchFamily="34" charset="-120"/>
+              </a:rPr>
+              <a:t>s</a:t>
+            </a:r>
+            <a:pPr indent="0" marL="0">
+              <a:buNone/>
+            </a:pPr>
+            <a:r>
+              <a:rPr lang="en-US" sz="2000" i="1" baseline="-40000" dirty="0">
+                <a:solidFill>
+                  <a:srgbClr val="FFFFFF"/>
+                </a:solidFill>
+                <a:latin typeface="Cambria Math" pitchFamily="34" charset="0"/>
+                <a:ea typeface="Cambria Math" pitchFamily="34" charset="-122"/>
+                <a:cs typeface="Cambria Math" pitchFamily="34" charset="-120"/>
+              </a:rPr>
+              <a:t>ij</a:t>
+            </a:r>
+            <a:pPr indent="0" marL="0">
+              <a:buNone/>
+            </a:pPr>
+            <a:r>
+              <a:rPr lang="en-US" sz="2000" dirty="0">
+                <a:solidFill>
+                  <a:srgbClr val="FFFFFF"/>
+                </a:solidFill>
+                <a:latin typeface="Cambria Math" pitchFamily="34" charset="0"/>
+                <a:ea typeface="Cambria Math" pitchFamily="34" charset="-122"/>
+                <a:cs typeface="Cambria Math" pitchFamily="34" charset="-120"/>
+              </a:rPr>
+              <a:t>, </a:t>
+            </a:r>
+            <a:pPr indent="0" marL="0">
+              <a:buNone/>
+            </a:pPr>
+            <a:r>
+              <a:rPr lang="en-US" sz="2000" i="1" dirty="0">
+                <a:solidFill>
+                  <a:srgbClr val="FFFFFF"/>
+                </a:solidFill>
+                <a:latin typeface="Cambria Math" pitchFamily="34" charset="0"/>
+                <a:ea typeface="Cambria Math" pitchFamily="34" charset="-122"/>
+                <a:cs typeface="Cambria Math" pitchFamily="34" charset="-120"/>
+              </a:rPr>
+              <a:t>d</a:t>
+            </a:r>
+            <a:pPr indent="0" marL="0">
+              <a:buNone/>
+            </a:pPr>
+            <a:r>
+              <a:rPr lang="en-US" sz="2000" i="1" baseline="-40000" dirty="0">
+                <a:solidFill>
+                  <a:srgbClr val="FFFFFF"/>
+                </a:solidFill>
+                <a:latin typeface="Cambria Math" pitchFamily="34" charset="0"/>
+                <a:ea typeface="Cambria Math" pitchFamily="34" charset="-122"/>
+                <a:cs typeface="Cambria Math" pitchFamily="34" charset="-120"/>
+              </a:rPr>
+              <a:t>ij</a:t>
+            </a:r>
+            <a:pPr indent="0" marL="0">
+              <a:buNone/>
+            </a:pPr>
+            <a:r>
+              <a:rPr lang="en-US" sz="2000" dirty="0">
+                <a:solidFill>
+                  <a:srgbClr val="FFFFFF"/>
+                </a:solidFill>
+                <a:latin typeface="Cambria Math" pitchFamily="34" charset="0"/>
+                <a:ea typeface="Cambria Math" pitchFamily="34" charset="-122"/>
+                <a:cs typeface="Cambria Math" pitchFamily="34" charset="-120"/>
+              </a:rPr>
+              <a:t>)</a:t>
+            </a:r>
+            <a:endParaRPr lang="en-US" sz="2000" dirty="0"/>
+          </a:p>
+        </p:txBody>
+      </p:sp>
+      <p:sp>
+        <p:nvSpPr>
+          <p:cNvPr id="23" name="Text 18"/>
+          <p:cNvSpPr txBox="1"/>
+          <p:nvPr/>
+        </p:nvSpPr>
+        <p:spPr>
+          <a:xfrm>
+            <a:off x="8714232" y="3246120"/>
+            <a:ext cx="2651760" cy="960120"/>
           </a:xfrm>
           <a:prstGeom prst="rect">
             <a:avLst/>
@@ -3475,49 +4261,6 @@
           <a:lstStyle/>
           <a:p>
             <a:pPr indent="0" marL="0">
-              <a:spcAft>
-                <a:spcPts val="300"/>
-              </a:spcAft>
-              <a:buNone/>
-            </a:pPr>
-            <a:r>
-              <a:rPr lang="en-US" sz="1200" b="1" spc="300" kern="0" dirty="0">
-                <a:solidFill>
-                  <a:srgbClr val="F2A65A"/>
-                </a:solidFill>
-                <a:latin typeface="Calibri" pitchFamily="34" charset="0"/>
-                <a:ea typeface="Calibri" pitchFamily="34" charset="-122"/>
-                <a:cs typeface="Calibri" pitchFamily="34" charset="-120"/>
-              </a:rPr>
-              <a:t>OBSERVED</a:t>
-            </a:r>
-            <a:endParaRPr lang="en-US" sz="1200" dirty="0"/>
-          </a:p>
-          <a:p>
-            <a:pPr indent="0" marL="0">
-              <a:spcAft>
-                <a:spcPts val="300"/>
-              </a:spcAft>
-              <a:buNone/>
-            </a:pPr>
-            <a:r>
-              <a:rPr lang="en-US" sz="2000" b="1" dirty="0">
-                <a:solidFill>
-                  <a:srgbClr val="FFFFFF"/>
-                </a:solidFill>
-                <a:latin typeface="Calibri" pitchFamily="34" charset="0"/>
-                <a:ea typeface="Calibri" pitchFamily="34" charset="-122"/>
-                <a:cs typeface="Calibri" pitchFamily="34" charset="-120"/>
-              </a:rPr>
-              <a:t>Texts, edges, labels, LLM scores</a:t>
-            </a:r>
-            <a:endParaRPr lang="en-US" sz="1200" dirty="0"/>
-          </a:p>
-          <a:p>
-            <a:pPr indent="0" marL="0">
-              <a:spcAft>
-                <a:spcPts val="300"/>
-              </a:spcAft>
               <a:buNone/>
             </a:pPr>
             <a:r>
@@ -3529,26 +4272,26 @@
                 <a:ea typeface="Calibri" pitchFamily="34" charset="-122"/>
                 <a:cs typeface="Calibri" pitchFamily="34" charset="-120"/>
               </a:rPr>
-              <a:t>Edges include injected ones; s_ij is the LLM’s rating</a:t>
-            </a:r>
-            <a:endParaRPr lang="en-US" sz="1200" dirty="0"/>
-          </a:p>
-        </p:txBody>
-      </p:sp>
-      <p:sp>
-        <p:nvSpPr>
-          <p:cNvPr id="10" name="Shape 8"/>
+              <a:t>Probability the edge is real, with uncertainty, combining both sources of evidence.</a:t>
+            </a:r>
+            <a:endParaRPr lang="en-US" sz="1400" dirty="0"/>
+          </a:p>
+        </p:txBody>
+      </p:sp>
+      <p:sp>
+        <p:nvSpPr>
+          <p:cNvPr id="24" name="Shape 19"/>
           <p:cNvSpPr/>
           <p:nvPr/>
         </p:nvSpPr>
         <p:spPr>
           <a:xfrm>
-            <a:off x="548640" y="4572000"/>
-            <a:ext cx="11091672" cy="731520"/>
+            <a:off x="548640" y="4617720"/>
+            <a:ext cx="11091672" cy="1280160"/>
           </a:xfrm>
           <a:prstGeom prst="roundRect">
             <a:avLst>
-              <a:gd name="adj" fmla="val 10000"/>
+              <a:gd name="adj" fmla="val 8571"/>
             </a:avLst>
           </a:prstGeom>
           <a:solidFill>
@@ -3564,14 +4307,14 @@
       </p:sp>
       <p:sp>
         <p:nvSpPr>
-          <p:cNvPr id="11" name="Text 9"/>
-          <p:cNvSpPr txBox="1"/>
-          <p:nvPr/>
-        </p:nvSpPr>
-        <p:spPr>
-          <a:xfrm>
-            <a:off x="548640" y="4572000"/>
-            <a:ext cx="11091672" cy="731520"/>
+          <p:cNvPr id="25" name="Text 20"/>
+          <p:cNvSpPr txBox="1"/>
+          <p:nvPr/>
+        </p:nvSpPr>
+        <p:spPr>
+          <a:xfrm>
+            <a:off x="822960" y="4617720"/>
+            <a:ext cx="822960" cy="1280160"/>
           </a:xfrm>
           <a:prstGeom prst="rect">
             <a:avLst/>
@@ -3583,34 +4326,152 @@
           <a:bodyPr wrap="square" lIns="0" tIns="0" rIns="0" bIns="0" rtlCol="0" anchor="ctr"/>
           <a:lstStyle/>
           <a:p>
-            <a:pPr algn="ctr" indent="0" marL="0">
-              <a:buNone/>
-            </a:pPr>
-            <a:r>
-              <a:rPr lang="en-US" sz="2000" dirty="0">
+            <a:pPr indent="0" marL="0">
+              <a:buNone/>
+            </a:pPr>
+            <a:r>
+              <a:rPr lang="en-US" sz="1300" b="1" spc="300" kern="0" dirty="0">
+                <a:solidFill>
+                  <a:srgbClr val="B4540A"/>
+                </a:solidFill>
+                <a:latin typeface="Calibri" pitchFamily="34" charset="0"/>
+                <a:ea typeface="Calibri" pitchFamily="34" charset="-122"/>
+                <a:cs typeface="Calibri" pitchFamily="34" charset="-120"/>
+              </a:rPr>
+              <a:t>THEN</a:t>
+            </a:r>
+            <a:endParaRPr lang="en-US" sz="1300" dirty="0"/>
+          </a:p>
+        </p:txBody>
+      </p:sp>
+      <p:sp>
+        <p:nvSpPr>
+          <p:cNvPr id="26" name="Shape 21"/>
+          <p:cNvSpPr/>
+          <p:nvPr/>
+        </p:nvSpPr>
+        <p:spPr>
+          <a:xfrm>
+            <a:off x="1737360" y="4846320"/>
+            <a:ext cx="2788920" cy="822960"/>
+          </a:xfrm>
+          <a:prstGeom prst="roundRect">
+            <a:avLst>
+              <a:gd name="adj" fmla="val 8889"/>
+            </a:avLst>
+          </a:prstGeom>
+          <a:solidFill>
+            <a:srgbClr val="F4F5F8"/>
+          </a:solidFill>
+          <a:ln w="12700">
+            <a:solidFill>
+              <a:srgbClr val="F4F5F8"/>
+            </a:solidFill>
+            <a:prstDash val="solid"/>
+          </a:ln>
+        </p:spPr>
+      </p:sp>
+      <p:sp>
+        <p:nvSpPr>
+          <p:cNvPr id="27" name="Text 22"/>
+          <p:cNvSpPr txBox="1"/>
+          <p:nvPr/>
+        </p:nvSpPr>
+        <p:spPr>
+          <a:xfrm>
+            <a:off x="1920240" y="4846320"/>
+            <a:ext cx="2423160" cy="822960"/>
+          </a:xfrm>
+          <a:prstGeom prst="rect">
+            <a:avLst/>
+          </a:prstGeom>
+          <a:noFill/>
+          <a:ln/>
+        </p:spPr>
+        <p:txBody>
+          <a:bodyPr wrap="square" lIns="0" tIns="0" rIns="0" bIns="0" rtlCol="0" anchor="ctr"/>
+          <a:lstStyle/>
+          <a:p>
+            <a:pPr indent="0" marL="0">
+              <a:buNone/>
+            </a:pPr>
+            <a:r>
+              <a:rPr lang="en-US" sz="1400" dirty="0">
                 <a:solidFill>
                   <a:srgbClr val="14213D"/>
                 </a:solidFill>
-                <a:latin typeface="Cambria Math" pitchFamily="34" charset="0"/>
-                <a:ea typeface="Cambria Math" pitchFamily="34" charset="-122"/>
-                <a:cs typeface="Cambria Math" pitchFamily="34" charset="-120"/>
-              </a:rPr>
-              <a:t>p(z_ij = 1 | s_ij, d_ij)  ∝  p(z_ij = 1 | s_ij)  ×  p(d_ij | z_ij = 1)</a:t>
-            </a:r>
-            <a:endParaRPr lang="en-US" sz="2000" dirty="0"/>
-          </a:p>
-        </p:txBody>
-      </p:sp>
-      <p:sp>
-        <p:nvSpPr>
-          <p:cNvPr id="12" name="Text 10"/>
-          <p:cNvSpPr txBox="1"/>
-          <p:nvPr/>
-        </p:nvSpPr>
-        <p:spPr>
-          <a:xfrm>
-            <a:off x="548640" y="5440680"/>
-            <a:ext cx="11091672" cy="548640"/>
+                <a:latin typeface="Calibri" pitchFamily="34" charset="0"/>
+                <a:ea typeface="Calibri" pitchFamily="34" charset="-122"/>
+                <a:cs typeface="Calibri" pitchFamily="34" charset="-120"/>
+              </a:rPr>
+              <a:t>Weight each GNN message by its edge’s posterior</a:t>
+            </a:r>
+            <a:endParaRPr lang="en-US" sz="1400" dirty="0"/>
+          </a:p>
+        </p:txBody>
+      </p:sp>
+      <p:sp>
+        <p:nvSpPr>
+          <p:cNvPr id="28" name="Shape 23"/>
+          <p:cNvSpPr/>
+          <p:nvPr/>
+        </p:nvSpPr>
+        <p:spPr>
+          <a:xfrm>
+            <a:off x="4590288" y="5102352"/>
+            <a:ext cx="384048" cy="310896"/>
+          </a:xfrm>
+          <a:prstGeom prst="rightArrow">
+            <a:avLst/>
+          </a:prstGeom>
+          <a:solidFill>
+            <a:srgbClr val="B4540A"/>
+          </a:solidFill>
+          <a:ln w="12700">
+            <a:solidFill>
+              <a:srgbClr val="B4540A"/>
+            </a:solidFill>
+            <a:prstDash val="solid"/>
+          </a:ln>
+        </p:spPr>
+      </p:sp>
+      <p:sp>
+        <p:nvSpPr>
+          <p:cNvPr id="29" name="Shape 24"/>
+          <p:cNvSpPr/>
+          <p:nvPr/>
+        </p:nvSpPr>
+        <p:spPr>
+          <a:xfrm>
+            <a:off x="5047488" y="4846320"/>
+            <a:ext cx="2788920" cy="822960"/>
+          </a:xfrm>
+          <a:prstGeom prst="roundRect">
+            <a:avLst>
+              <a:gd name="adj" fmla="val 8889"/>
+            </a:avLst>
+          </a:prstGeom>
+          <a:solidFill>
+            <a:srgbClr val="F4F5F8"/>
+          </a:solidFill>
+          <a:ln w="12700">
+            <a:solidFill>
+              <a:srgbClr val="F4F5F8"/>
+            </a:solidFill>
+            <a:prstDash val="solid"/>
+          </a:ln>
+        </p:spPr>
+      </p:sp>
+      <p:sp>
+        <p:nvSpPr>
+          <p:cNvPr id="30" name="Text 25"/>
+          <p:cNvSpPr txBox="1"/>
+          <p:nvPr/>
+        </p:nvSpPr>
+        <p:spPr>
+          <a:xfrm>
+            <a:off x="5230368" y="4846320"/>
+            <a:ext cx="2423160" cy="822960"/>
           </a:xfrm>
           <a:prstGeom prst="rect">
             <a:avLst/>
@@ -3622,11 +4483,141 @@
           <a:bodyPr wrap="square" lIns="0" tIns="0" rIns="0" bIns="0" rtlCol="0" anchor="ctr"/>
           <a:lstStyle/>
           <a:p>
-            <a:pPr algn="ctr" indent="0" marL="0">
-              <a:buNone/>
-            </a:pPr>
-            <a:r>
-              <a:rPr lang="en-US" sz="1300" dirty="0">
+            <a:pPr indent="0" marL="0">
+              <a:buNone/>
+            </a:pPr>
+            <a:r>
+              <a:rPr lang="en-US" sz="1400" dirty="0">
+                <a:solidFill>
+                  <a:srgbClr val="14213D"/>
+                </a:solidFill>
+                <a:latin typeface="Calibri" pitchFamily="34" charset="0"/>
+                <a:ea typeface="Calibri" pitchFamily="34" charset="-122"/>
+                <a:cs typeface="Calibri" pitchFamily="34" charset="-120"/>
+              </a:rPr>
+              <a:t>Give GNN weights W a posterior too (MC dropout, ensembles, VI)</a:t>
+            </a:r>
+            <a:endParaRPr lang="en-US" sz="1400" dirty="0"/>
+          </a:p>
+        </p:txBody>
+      </p:sp>
+      <p:sp>
+        <p:nvSpPr>
+          <p:cNvPr id="31" name="Shape 26"/>
+          <p:cNvSpPr/>
+          <p:nvPr/>
+        </p:nvSpPr>
+        <p:spPr>
+          <a:xfrm>
+            <a:off x="7900416" y="5102352"/>
+            <a:ext cx="384048" cy="310896"/>
+          </a:xfrm>
+          <a:prstGeom prst="rightArrow">
+            <a:avLst/>
+          </a:prstGeom>
+          <a:solidFill>
+            <a:srgbClr val="B4540A"/>
+          </a:solidFill>
+          <a:ln w="12700">
+            <a:solidFill>
+              <a:srgbClr val="B4540A"/>
+            </a:solidFill>
+            <a:prstDash val="solid"/>
+          </a:ln>
+        </p:spPr>
+      </p:sp>
+      <p:sp>
+        <p:nvSpPr>
+          <p:cNvPr id="32" name="Shape 27"/>
+          <p:cNvSpPr/>
+          <p:nvPr/>
+        </p:nvSpPr>
+        <p:spPr>
+          <a:xfrm>
+            <a:off x="8357616" y="4846320"/>
+            <a:ext cx="2788920" cy="822960"/>
+          </a:xfrm>
+          <a:prstGeom prst="roundRect">
+            <a:avLst>
+              <a:gd name="adj" fmla="val 8889"/>
+            </a:avLst>
+          </a:prstGeom>
+          <a:solidFill>
+            <a:srgbClr val="F4F5F8"/>
+          </a:solidFill>
+          <a:ln w="12700">
+            <a:solidFill>
+              <a:srgbClr val="F4F5F8"/>
+            </a:solidFill>
+            <a:prstDash val="solid"/>
+          </a:ln>
+        </p:spPr>
+      </p:sp>
+      <p:sp>
+        <p:nvSpPr>
+          <p:cNvPr id="33" name="Text 28"/>
+          <p:cNvSpPr txBox="1"/>
+          <p:nvPr/>
+        </p:nvSpPr>
+        <p:spPr>
+          <a:xfrm>
+            <a:off x="8540496" y="4846320"/>
+            <a:ext cx="2423160" cy="822960"/>
+          </a:xfrm>
+          <a:prstGeom prst="rect">
+            <a:avLst/>
+          </a:prstGeom>
+          <a:noFill/>
+          <a:ln/>
+        </p:spPr>
+        <p:txBody>
+          <a:bodyPr wrap="square" lIns="0" tIns="0" rIns="0" bIns="0" rtlCol="0" anchor="ctr"/>
+          <a:lstStyle/>
+          <a:p>
+            <a:pPr indent="0" marL="0">
+              <a:buNone/>
+            </a:pPr>
+            <a:r>
+              <a:rPr lang="en-US" sz="1400" b="1" dirty="0">
+                <a:solidFill>
+                  <a:srgbClr val="14213D"/>
+                </a:solidFill>
+                <a:latin typeface="Calibri" pitchFamily="34" charset="0"/>
+                <a:ea typeface="Calibri" pitchFamily="34" charset="-122"/>
+                <a:cs typeface="Calibri" pitchFamily="34" charset="-120"/>
+              </a:rPr>
+              <a:t>Predict node labels with uncertainty</a:t>
+            </a:r>
+            <a:endParaRPr lang="en-US" sz="1400" dirty="0"/>
+          </a:p>
+        </p:txBody>
+      </p:sp>
+      <p:sp>
+        <p:nvSpPr>
+          <p:cNvPr id="34" name="Text 29"/>
+          <p:cNvSpPr txBox="1"/>
+          <p:nvPr/>
+        </p:nvSpPr>
+        <p:spPr>
+          <a:xfrm>
+            <a:off x="548640" y="6035040"/>
+            <a:ext cx="11091672" cy="256032"/>
+          </a:xfrm>
+          <a:prstGeom prst="rect">
+            <a:avLst/>
+          </a:prstGeom>
+          <a:noFill/>
+          <a:ln/>
+        </p:spPr>
+        <p:txBody>
+          <a:bodyPr wrap="square" lIns="0" tIns="0" rIns="0" bIns="0" rtlCol="0" anchor="ctr"/>
+          <a:lstStyle/>
+          <a:p>
+            <a:pPr indent="0" marL="0">
+              <a:buNone/>
+            </a:pPr>
+            <a:r>
+              <a:rPr lang="en-US" sz="1200" dirty="0">
                 <a:solidFill>
                   <a:srgbClr val="4A5568"/>
                 </a:solidFill>
@@ -3634,15 +4625,85 @@
                 <a:ea typeface="Calibri" pitchFamily="34" charset="-122"/>
                 <a:cs typeface="Calibri" pitchFamily="34" charset="-120"/>
               </a:rPr>
-              <a:t>LLM text prior × structural likelihood   ·   s_ij: LLM rating of the edge, treated as noisy evidence   ·   d_ij: how far apart the endpoints’ representations are</a:t>
-            </a:r>
-            <a:endParaRPr lang="en-US" sz="1300" dirty="0"/>
-          </a:p>
-        </p:txBody>
-      </p:sp>
-      <p:sp>
-        <p:nvSpPr>
-          <p:cNvPr id="13" name="Text 11"/>
+              <a:t>Hidden: </a:t>
+            </a:r>
+            <a:pPr indent="0" marL="0">
+              <a:buNone/>
+            </a:pPr>
+            <a:r>
+              <a:rPr lang="en-US" sz="1200" i="1" dirty="0">
+                <a:solidFill>
+                  <a:srgbClr val="4A5568"/>
+                </a:solidFill>
+                <a:latin typeface="Calibri" pitchFamily="34" charset="0"/>
+                <a:ea typeface="Calibri" pitchFamily="34" charset="-122"/>
+                <a:cs typeface="Calibri" pitchFamily="34" charset="-120"/>
+              </a:rPr>
+              <a:t>z</a:t>
+            </a:r>
+            <a:pPr indent="0" marL="0">
+              <a:buNone/>
+            </a:pPr>
+            <a:r>
+              <a:rPr lang="en-US" sz="1200" i="1" baseline="-40000" dirty="0">
+                <a:solidFill>
+                  <a:srgbClr val="4A5568"/>
+                </a:solidFill>
+                <a:latin typeface="Calibri" pitchFamily="34" charset="0"/>
+                <a:ea typeface="Calibri" pitchFamily="34" charset="-122"/>
+                <a:cs typeface="Calibri" pitchFamily="34" charset="-120"/>
+              </a:rPr>
+              <a:t>ij</a:t>
+            </a:r>
+            <a:pPr indent="0" marL="0">
+              <a:buNone/>
+            </a:pPr>
+            <a:r>
+              <a:rPr lang="en-US" sz="1200" dirty="0">
+                <a:solidFill>
+                  <a:srgbClr val="4A5568"/>
+                </a:solidFill>
+                <a:latin typeface="Calibri" pitchFamily="34" charset="0"/>
+                <a:ea typeface="Calibri" pitchFamily="34" charset="-122"/>
+                <a:cs typeface="Calibri" pitchFamily="34" charset="-120"/>
+              </a:rPr>
+              <a:t>, W   ·   Observed: node texts, edges (incl. injected), training labels, LLM scores </a:t>
+            </a:r>
+            <a:pPr indent="0" marL="0">
+              <a:buNone/>
+            </a:pPr>
+            <a:r>
+              <a:rPr lang="en-US" sz="1200" i="1" dirty="0">
+                <a:solidFill>
+                  <a:srgbClr val="4A5568"/>
+                </a:solidFill>
+                <a:latin typeface="Calibri" pitchFamily="34" charset="0"/>
+                <a:ea typeface="Calibri" pitchFamily="34" charset="-122"/>
+                <a:cs typeface="Calibri" pitchFamily="34" charset="-120"/>
+              </a:rPr>
+              <a:t>s</a:t>
+            </a:r>
+            <a:pPr indent="0" marL="0">
+              <a:buNone/>
+            </a:pPr>
+            <a:r>
+              <a:rPr lang="en-US" sz="1200" i="1" baseline="-40000" dirty="0">
+                <a:solidFill>
+                  <a:srgbClr val="4A5568"/>
+                </a:solidFill>
+                <a:latin typeface="Calibri" pitchFamily="34" charset="0"/>
+                <a:ea typeface="Calibri" pitchFamily="34" charset="-122"/>
+                <a:cs typeface="Calibri" pitchFamily="34" charset="-120"/>
+              </a:rPr>
+              <a:t>ij</a:t>
+            </a:r>
+            <a:endParaRPr lang="en-US" sz="1200" dirty="0"/>
+          </a:p>
+        </p:txBody>
+      </p:sp>
+      <p:sp>
+        <p:nvSpPr>
+          <p:cNvPr id="35" name="Text 30"/>
           <p:cNvSpPr txBox="1"/>
           <p:nvPr/>
         </p:nvSpPr>
@@ -3681,7 +4742,7 @@
       </p:sp>
       <p:sp>
         <p:nvSpPr>
-          <p:cNvPr id="14" name="Text 12"/>
+          <p:cNvPr id="36" name="Text 31"/>
           <p:cNvSpPr txBox="1"/>
           <p:nvPr/>
         </p:nvSpPr>

--- a/cse5825-bayesian-ml/project0/proj0_pitch_gnn.pptx
+++ b/cse5825-bayesian-ml/project0/proj0_pitch_gnn.pptx
@@ -3258,6 +3258,20 @@
                 <a:ea typeface="Calibri" pitchFamily="34" charset="-122"/>
                 <a:cs typeface="Calibri" pitchFamily="34" charset="-120"/>
               </a:rPr>
+              <a:t> </a:t>
+            </a:r>
+            <a:pPr indent="0" marL="0">
+              <a:buNone/>
+            </a:pPr>
+            <a:r>
+              <a:rPr lang="en-US" sz="1600" dirty="0">
+                <a:solidFill>
+                  <a:srgbClr val="4A5568"/>
+                </a:solidFill>
+                <a:latin typeface="Calibri" pitchFamily="34" charset="0"/>
+                <a:ea typeface="Calibri" pitchFamily="34" charset="-122"/>
+                <a:cs typeface="Calibri" pitchFamily="34" charset="-120"/>
+              </a:rPr>
               <a:t> = 1) or injected (</a:t>
             </a:r>
             <a:pPr indent="0" marL="0">
@@ -3287,6 +3301,20 @@
                 <a:cs typeface="Calibri" pitchFamily="34" charset="-120"/>
               </a:rPr>
               <a:t>ij</a:t>
+            </a:r>
+            <a:pPr indent="0" marL="0">
+              <a:buNone/>
+            </a:pPr>
+            <a:r>
+              <a:rPr lang="en-US" sz="1600" dirty="0">
+                <a:solidFill>
+                  <a:srgbClr val="4A5568"/>
+                </a:solidFill>
+                <a:latin typeface="Calibri" pitchFamily="34" charset="0"/>
+                <a:ea typeface="Calibri" pitchFamily="34" charset="-122"/>
+                <a:cs typeface="Calibri" pitchFamily="34" charset="-120"/>
+              </a:rPr>
+              <a:t> </a:t>
             </a:r>
             <a:pPr indent="0" marL="0">
               <a:buNone/>
@@ -3503,13 +3531,13 @@
                 <a:ea typeface="Cambria Math" pitchFamily="34" charset="-122"/>
                 <a:cs typeface="Cambria Math" pitchFamily="34" charset="-120"/>
               </a:rPr>
-              <a:t> = 1 | </a:t>
-            </a:r>
-            <a:pPr indent="0" marL="0">
-              <a:buNone/>
-            </a:pPr>
-            <a:r>
-              <a:rPr lang="en-US" sz="2000" i="1" dirty="0">
+              <a:t> </a:t>
+            </a:r>
+            <a:pPr indent="0" marL="0">
+              <a:buNone/>
+            </a:pPr>
+            <a:r>
+              <a:rPr lang="en-US" sz="2000" dirty="0">
                 <a:solidFill>
                   <a:srgbClr val="14213D"/>
                 </a:solidFill>
@@ -3517,13 +3545,13 @@
                 <a:ea typeface="Cambria Math" pitchFamily="34" charset="-122"/>
                 <a:cs typeface="Cambria Math" pitchFamily="34" charset="-120"/>
               </a:rPr>
-              <a:t>s</a:t>
-            </a:r>
-            <a:pPr indent="0" marL="0">
-              <a:buNone/>
-            </a:pPr>
-            <a:r>
-              <a:rPr lang="en-US" sz="2000" i="1" baseline="-40000" dirty="0">
+              <a:t> = 1 | </a:t>
+            </a:r>
+            <a:pPr indent="0" marL="0">
+              <a:buNone/>
+            </a:pPr>
+            <a:r>
+              <a:rPr lang="en-US" sz="2000" i="1" dirty="0">
                 <a:solidFill>
                   <a:srgbClr val="14213D"/>
                 </a:solidFill>
@@ -3531,7 +3559,35 @@
                 <a:ea typeface="Cambria Math" pitchFamily="34" charset="-122"/>
                 <a:cs typeface="Cambria Math" pitchFamily="34" charset="-120"/>
               </a:rPr>
+              <a:t>s</a:t>
+            </a:r>
+            <a:pPr indent="0" marL="0">
+              <a:buNone/>
+            </a:pPr>
+            <a:r>
+              <a:rPr lang="en-US" sz="2000" i="1" baseline="-40000" dirty="0">
+                <a:solidFill>
+                  <a:srgbClr val="14213D"/>
+                </a:solidFill>
+                <a:latin typeface="Cambria Math" pitchFamily="34" charset="0"/>
+                <a:ea typeface="Cambria Math" pitchFamily="34" charset="-122"/>
+                <a:cs typeface="Cambria Math" pitchFamily="34" charset="-120"/>
+              </a:rPr>
               <a:t>ij</a:t>
+            </a:r>
+            <a:pPr indent="0" marL="0">
+              <a:buNone/>
+            </a:pPr>
+            <a:r>
+              <a:rPr lang="en-US" sz="2000" dirty="0">
+                <a:solidFill>
+                  <a:srgbClr val="14213D"/>
+                </a:solidFill>
+                <a:latin typeface="Cambria Math" pitchFamily="34" charset="0"/>
+                <a:ea typeface="Cambria Math" pitchFamily="34" charset="-122"/>
+                <a:cs typeface="Cambria Math" pitchFamily="34" charset="-120"/>
+              </a:rPr>
+              <a:t> </a:t>
             </a:r>
             <a:pPr indent="0" marL="0">
               <a:buNone/>
@@ -3826,13 +3882,13 @@
                 <a:ea typeface="Cambria Math" pitchFamily="34" charset="-122"/>
                 <a:cs typeface="Cambria Math" pitchFamily="34" charset="-120"/>
               </a:rPr>
-              <a:t> | </a:t>
-            </a:r>
-            <a:pPr indent="0" marL="0">
-              <a:buNone/>
-            </a:pPr>
-            <a:r>
-              <a:rPr lang="en-US" sz="2000" i="1" dirty="0">
+              <a:t> </a:t>
+            </a:r>
+            <a:pPr indent="0" marL="0">
+              <a:buNone/>
+            </a:pPr>
+            <a:r>
+              <a:rPr lang="en-US" sz="2000" dirty="0">
                 <a:solidFill>
                   <a:srgbClr val="14213D"/>
                 </a:solidFill>
@@ -3840,13 +3896,13 @@
                 <a:ea typeface="Cambria Math" pitchFamily="34" charset="-122"/>
                 <a:cs typeface="Cambria Math" pitchFamily="34" charset="-120"/>
               </a:rPr>
-              <a:t>z</a:t>
-            </a:r>
-            <a:pPr indent="0" marL="0">
-              <a:buNone/>
-            </a:pPr>
-            <a:r>
-              <a:rPr lang="en-US" sz="2000" i="1" baseline="-40000" dirty="0">
+              <a:t> | </a:t>
+            </a:r>
+            <a:pPr indent="0" marL="0">
+              <a:buNone/>
+            </a:pPr>
+            <a:r>
+              <a:rPr lang="en-US" sz="2000" i="1" dirty="0">
                 <a:solidFill>
                   <a:srgbClr val="14213D"/>
                 </a:solidFill>
@@ -3854,7 +3910,35 @@
                 <a:ea typeface="Cambria Math" pitchFamily="34" charset="-122"/>
                 <a:cs typeface="Cambria Math" pitchFamily="34" charset="-120"/>
               </a:rPr>
+              <a:t>z</a:t>
+            </a:r>
+            <a:pPr indent="0" marL="0">
+              <a:buNone/>
+            </a:pPr>
+            <a:r>
+              <a:rPr lang="en-US" sz="2000" i="1" baseline="-40000" dirty="0">
+                <a:solidFill>
+                  <a:srgbClr val="14213D"/>
+                </a:solidFill>
+                <a:latin typeface="Cambria Math" pitchFamily="34" charset="0"/>
+                <a:ea typeface="Cambria Math" pitchFamily="34" charset="-122"/>
+                <a:cs typeface="Cambria Math" pitchFamily="34" charset="-120"/>
+              </a:rPr>
               <a:t>ij</a:t>
+            </a:r>
+            <a:pPr indent="0" marL="0">
+              <a:buNone/>
+            </a:pPr>
+            <a:r>
+              <a:rPr lang="en-US" sz="2000" dirty="0">
+                <a:solidFill>
+                  <a:srgbClr val="14213D"/>
+                </a:solidFill>
+                <a:latin typeface="Cambria Math" pitchFamily="34" charset="0"/>
+                <a:ea typeface="Cambria Math" pitchFamily="34" charset="-122"/>
+                <a:cs typeface="Cambria Math" pitchFamily="34" charset="-120"/>
+              </a:rPr>
+              <a:t> </a:t>
             </a:r>
             <a:pPr indent="0" marL="0">
               <a:buNone/>
@@ -4149,13 +4233,13 @@
                 <a:ea typeface="Cambria Math" pitchFamily="34" charset="-122"/>
                 <a:cs typeface="Cambria Math" pitchFamily="34" charset="-120"/>
               </a:rPr>
-              <a:t> = 1 | </a:t>
-            </a:r>
-            <a:pPr indent="0" marL="0">
-              <a:buNone/>
-            </a:pPr>
-            <a:r>
-              <a:rPr lang="en-US" sz="2000" i="1" dirty="0">
+              <a:t> </a:t>
+            </a:r>
+            <a:pPr indent="0" marL="0">
+              <a:buNone/>
+            </a:pPr>
+            <a:r>
+              <a:rPr lang="en-US" sz="2000" dirty="0">
                 <a:solidFill>
                   <a:srgbClr val="FFFFFF"/>
                 </a:solidFill>
@@ -4163,13 +4247,13 @@
                 <a:ea typeface="Cambria Math" pitchFamily="34" charset="-122"/>
                 <a:cs typeface="Cambria Math" pitchFamily="34" charset="-120"/>
               </a:rPr>
-              <a:t>s</a:t>
-            </a:r>
-            <a:pPr indent="0" marL="0">
-              <a:buNone/>
-            </a:pPr>
-            <a:r>
-              <a:rPr lang="en-US" sz="2000" i="1" baseline="-40000" dirty="0">
+              <a:t> = 1 | </a:t>
+            </a:r>
+            <a:pPr indent="0" marL="0">
+              <a:buNone/>
+            </a:pPr>
+            <a:r>
+              <a:rPr lang="en-US" sz="2000" i="1" dirty="0">
                 <a:solidFill>
                   <a:srgbClr val="FFFFFF"/>
                 </a:solidFill>
@@ -4177,13 +4261,13 @@
                 <a:ea typeface="Cambria Math" pitchFamily="34" charset="-122"/>
                 <a:cs typeface="Cambria Math" pitchFamily="34" charset="-120"/>
               </a:rPr>
-              <a:t>ij</a:t>
-            </a:r>
-            <a:pPr indent="0" marL="0">
-              <a:buNone/>
-            </a:pPr>
-            <a:r>
-              <a:rPr lang="en-US" sz="2000" dirty="0">
+              <a:t>s</a:t>
+            </a:r>
+            <a:pPr indent="0" marL="0">
+              <a:buNone/>
+            </a:pPr>
+            <a:r>
+              <a:rPr lang="en-US" sz="2000" i="1" baseline="-40000" dirty="0">
                 <a:solidFill>
                   <a:srgbClr val="FFFFFF"/>
                 </a:solidFill>
@@ -4191,13 +4275,13 @@
                 <a:ea typeface="Cambria Math" pitchFamily="34" charset="-122"/>
                 <a:cs typeface="Cambria Math" pitchFamily="34" charset="-120"/>
               </a:rPr>
-              <a:t>, </a:t>
-            </a:r>
-            <a:pPr indent="0" marL="0">
-              <a:buNone/>
-            </a:pPr>
-            <a:r>
-              <a:rPr lang="en-US" sz="2000" i="1" dirty="0">
+              <a:t>ij</a:t>
+            </a:r>
+            <a:pPr indent="0" marL="0">
+              <a:buNone/>
+            </a:pPr>
+            <a:r>
+              <a:rPr lang="en-US" sz="2000" dirty="0">
                 <a:solidFill>
                   <a:srgbClr val="FFFFFF"/>
                 </a:solidFill>
@@ -4205,13 +4289,13 @@
                 <a:ea typeface="Cambria Math" pitchFamily="34" charset="-122"/>
                 <a:cs typeface="Cambria Math" pitchFamily="34" charset="-120"/>
               </a:rPr>
-              <a:t>d</a:t>
-            </a:r>
-            <a:pPr indent="0" marL="0">
-              <a:buNone/>
-            </a:pPr>
-            <a:r>
-              <a:rPr lang="en-US" sz="2000" i="1" baseline="-40000" dirty="0">
+              <a:t> </a:t>
+            </a:r>
+            <a:pPr indent="0" marL="0">
+              <a:buNone/>
+            </a:pPr>
+            <a:r>
+              <a:rPr lang="en-US" sz="2000" dirty="0">
                 <a:solidFill>
                   <a:srgbClr val="FFFFFF"/>
                 </a:solidFill>
@@ -4219,7 +4303,49 @@
                 <a:ea typeface="Cambria Math" pitchFamily="34" charset="-122"/>
                 <a:cs typeface="Cambria Math" pitchFamily="34" charset="-120"/>
               </a:rPr>
+              <a:t>, </a:t>
+            </a:r>
+            <a:pPr indent="0" marL="0">
+              <a:buNone/>
+            </a:pPr>
+            <a:r>
+              <a:rPr lang="en-US" sz="2000" i="1" dirty="0">
+                <a:solidFill>
+                  <a:srgbClr val="FFFFFF"/>
+                </a:solidFill>
+                <a:latin typeface="Cambria Math" pitchFamily="34" charset="0"/>
+                <a:ea typeface="Cambria Math" pitchFamily="34" charset="-122"/>
+                <a:cs typeface="Cambria Math" pitchFamily="34" charset="-120"/>
+              </a:rPr>
+              <a:t>d</a:t>
+            </a:r>
+            <a:pPr indent="0" marL="0">
+              <a:buNone/>
+            </a:pPr>
+            <a:r>
+              <a:rPr lang="en-US" sz="2000" i="1" baseline="-40000" dirty="0">
+                <a:solidFill>
+                  <a:srgbClr val="FFFFFF"/>
+                </a:solidFill>
+                <a:latin typeface="Cambria Math" pitchFamily="34" charset="0"/>
+                <a:ea typeface="Cambria Math" pitchFamily="34" charset="-122"/>
+                <a:cs typeface="Cambria Math" pitchFamily="34" charset="-120"/>
+              </a:rPr>
               <a:t>ij</a:t>
+            </a:r>
+            <a:pPr indent="0" marL="0">
+              <a:buNone/>
+            </a:pPr>
+            <a:r>
+              <a:rPr lang="en-US" sz="2000" dirty="0">
+                <a:solidFill>
+                  <a:srgbClr val="FFFFFF"/>
+                </a:solidFill>
+                <a:latin typeface="Cambria Math" pitchFamily="34" charset="0"/>
+                <a:ea typeface="Cambria Math" pitchFamily="34" charset="-122"/>
+                <a:cs typeface="Cambria Math" pitchFamily="34" charset="-120"/>
+              </a:rPr>
+              <a:t> </a:t>
             </a:r>
             <a:pPr indent="0" marL="0">
               <a:buNone/>
@@ -4495,7 +4621,35 @@
                 <a:ea typeface="Calibri" pitchFamily="34" charset="-122"/>
                 <a:cs typeface="Calibri" pitchFamily="34" charset="-120"/>
               </a:rPr>
-              <a:t>Give GNN weights W a posterior too (MC dropout, ensembles, VI)</a:t>
+              <a:t>Give GNN weights </a:t>
+            </a:r>
+            <a:pPr indent="0" marL="0">
+              <a:buNone/>
+            </a:pPr>
+            <a:r>
+              <a:rPr lang="en-US" sz="1400" i="1" dirty="0">
+                <a:solidFill>
+                  <a:srgbClr val="14213D"/>
+                </a:solidFill>
+                <a:latin typeface="Calibri" pitchFamily="34" charset="0"/>
+                <a:ea typeface="Calibri" pitchFamily="34" charset="-122"/>
+                <a:cs typeface="Calibri" pitchFamily="34" charset="-120"/>
+              </a:rPr>
+              <a:t>W</a:t>
+            </a:r>
+            <a:pPr indent="0" marL="0">
+              <a:buNone/>
+            </a:pPr>
+            <a:r>
+              <a:rPr lang="en-US" sz="1400" dirty="0">
+                <a:solidFill>
+                  <a:srgbClr val="14213D"/>
+                </a:solidFill>
+                <a:latin typeface="Calibri" pitchFamily="34" charset="0"/>
+                <a:ea typeface="Calibri" pitchFamily="34" charset="-122"/>
+                <a:cs typeface="Calibri" pitchFamily="34" charset="-120"/>
+              </a:rPr>
+              <a:t> a posterior too (MC dropout, ensembles, VI)</a:t>
             </a:r>
             <a:endParaRPr lang="en-US" sz="1400" dirty="0"/>
           </a:p>
@@ -4667,7 +4821,21 @@
                 <a:ea typeface="Calibri" pitchFamily="34" charset="-122"/>
                 <a:cs typeface="Calibri" pitchFamily="34" charset="-120"/>
               </a:rPr>
-              <a:t>, W   ·   Observed: node texts, edges (incl. injected), training labels, LLM scores </a:t>
+              <a:t> </a:t>
+            </a:r>
+            <a:pPr indent="0" marL="0">
+              <a:buNone/>
+            </a:pPr>
+            <a:r>
+              <a:rPr lang="en-US" sz="1200" dirty="0">
+                <a:solidFill>
+                  <a:srgbClr val="4A5568"/>
+                </a:solidFill>
+                <a:latin typeface="Calibri" pitchFamily="34" charset="0"/>
+                <a:ea typeface="Calibri" pitchFamily="34" charset="-122"/>
+                <a:cs typeface="Calibri" pitchFamily="34" charset="-120"/>
+              </a:rPr>
+              <a:t>, </a:t>
             </a:r>
             <a:pPr indent="0" marL="0">
               <a:buNone/>
@@ -4681,6 +4849,34 @@
                 <a:ea typeface="Calibri" pitchFamily="34" charset="-122"/>
                 <a:cs typeface="Calibri" pitchFamily="34" charset="-120"/>
               </a:rPr>
+              <a:t>W</a:t>
+            </a:r>
+            <a:pPr indent="0" marL="0">
+              <a:buNone/>
+            </a:pPr>
+            <a:r>
+              <a:rPr lang="en-US" sz="1200" dirty="0">
+                <a:solidFill>
+                  <a:srgbClr val="4A5568"/>
+                </a:solidFill>
+                <a:latin typeface="Calibri" pitchFamily="34" charset="0"/>
+                <a:ea typeface="Calibri" pitchFamily="34" charset="-122"/>
+                <a:cs typeface="Calibri" pitchFamily="34" charset="-120"/>
+              </a:rPr>
+              <a:t>   ·   Observed: node texts, edges (incl. injected), training labels, LLM scores </a:t>
+            </a:r>
+            <a:pPr indent="0" marL="0">
+              <a:buNone/>
+            </a:pPr>
+            <a:r>
+              <a:rPr lang="en-US" sz="1200" i="1" dirty="0">
+                <a:solidFill>
+                  <a:srgbClr val="4A5568"/>
+                </a:solidFill>
+                <a:latin typeface="Calibri" pitchFamily="34" charset="0"/>
+                <a:ea typeface="Calibri" pitchFamily="34" charset="-122"/>
+                <a:cs typeface="Calibri" pitchFamily="34" charset="-120"/>
+              </a:rPr>
               <a:t>s</a:t>
             </a:r>
             <a:pPr indent="0" marL="0">
@@ -4696,6 +4892,20 @@
                 <a:cs typeface="Calibri" pitchFamily="34" charset="-120"/>
               </a:rPr>
               <a:t>ij</a:t>
+            </a:r>
+            <a:pPr indent="0" marL="0">
+              <a:buNone/>
+            </a:pPr>
+            <a:r>
+              <a:rPr lang="en-US" sz="1200" dirty="0">
+                <a:solidFill>
+                  <a:srgbClr val="4A5568"/>
+                </a:solidFill>
+                <a:latin typeface="Calibri" pitchFamily="34" charset="0"/>
+                <a:ea typeface="Calibri" pitchFamily="34" charset="-122"/>
+                <a:cs typeface="Calibri" pitchFamily="34" charset="-120"/>
+              </a:rPr>
+              <a:t> </a:t>
             </a:r>
             <a:endParaRPr lang="en-US" sz="1200" dirty="0"/>
           </a:p>

--- a/cse5825-bayesian-ml/project0/proj0_pitch_gnn.pptx
+++ b/cse5825-bayesian-ml/project0/proj0_pitch_gnn.pptx
@@ -4,6 +4,9 @@
   <p:sldMasterIdLst>
     <p:sldMasterId id="2147483648" r:id="rId1"/>
   </p:sldMasterIdLst>
+  <p:notesMasterIdLst>
+    <p:notesMasterId r:id="rId9"/>
+  </p:notesMasterIdLst>
   <p:sldIdLst>
     <p:sldId id="256" r:id="rId2"/>
     <p:sldId id="257" r:id="rId3"/>
@@ -13,9 +16,6 @@
     <p:sldId id="261" r:id="rId7"/>
     <p:sldId id="262" r:id="rId8"/>
   </p:sldIdLst>
-  <p:notesMasterIdLst>
-    <p:notesMasterId r:id="rId9"/>
-  </p:notesMasterIdLst>
   <p:sldSz cx="12192000" cy="6858000"/>
   <p:notesSz cx="6858000" cy="12192000"/>
   <p:defaultTextStyle>
@@ -110,6 +110,11 @@
       </a:defRPr>
     </a:lvl9pPr>
   </p:defaultTextStyle>
+  <p:extLst>
+    <p:ext uri="{EFAFB233-063F-42B5-8137-9DF3F51BA10A}">
+      <p15:sldGuideLst xmlns:p15="http://schemas.microsoft.com/office/powerpoint/2012/main"/>
+    </p:ext>
+  </p:extLst>
 </p:presentation>
 </file>
 
@@ -135,234 +140,10 @@
           <a:chExt cx="0" cy="0"/>
         </a:xfrm>
       </p:grpSpPr>
-      <p:sp>
-        <p:nvSpPr>
-          <p:cNvPr id="2" name="Header Placeholder 1"/>
-          <p:cNvSpPr>
-            <a:spLocks noGrp="1"/>
-          </p:cNvSpPr>
-          <p:nvPr>
-            <p:ph type="hdr" sz="quarter"/>
-          </p:nvPr>
-        </p:nvSpPr>
-        <p:spPr>
-          <a:xfrm>
-            <a:off x="0" y="0"/>
-            <a:ext cx="2971800" cy="458788"/>
-          </a:xfrm>
-          <a:prstGeom prst="rect">
-            <a:avLst/>
-          </a:prstGeom>
-        </p:spPr>
-        <p:txBody>
-          <a:bodyPr vert="horz" lIns="91440" tIns="45720" rIns="91440" bIns="45720" rtlCol="0"/>
-          <a:lstStyle>
-            <a:lvl1pPr algn="l">
-              <a:defRPr sz="1200"/>
-            </a:lvl1pPr>
-          </a:lstStyle>
-          <a:p>
-            <a:endParaRPr lang="en-US"/>
-          </a:p>
-        </p:txBody>
-      </p:sp>
-      <p:sp>
-        <p:nvSpPr>
-          <p:cNvPr id="3" name="Date Placeholder 2"/>
-          <p:cNvSpPr>
-            <a:spLocks noGrp="1"/>
-          </p:cNvSpPr>
-          <p:nvPr>
-            <p:ph type="dt" idx="1"/>
-          </p:nvPr>
-        </p:nvSpPr>
-        <p:spPr>
-          <a:xfrm>
-            <a:off x="3884613" y="0"/>
-            <a:ext cx="2971800" cy="458788"/>
-          </a:xfrm>
-          <a:prstGeom prst="rect">
-            <a:avLst/>
-          </a:prstGeom>
-        </p:spPr>
-        <p:txBody>
-          <a:bodyPr vert="horz" lIns="91440" tIns="45720" rIns="91440" bIns="45720" rtlCol="0"/>
-          <a:lstStyle>
-            <a:lvl1pPr algn="r">
-              <a:defRPr sz="1200"/>
-            </a:lvl1pPr>
-          </a:lstStyle>
-          <a:p>
-            <a:fld id="{5282F153-3F37-0F45-9E97-73ACFA13230C}" type="datetimeFigureOut">
-              <a:rPr lang="en-US"/>
-              <a:t>7/23/19</a:t>
-            </a:fld>
-            <a:endParaRPr lang="en-US"/>
-          </a:p>
-        </p:txBody>
-      </p:sp>
-      <p:sp>
-        <p:nvSpPr>
-          <p:cNvPr id="4" name="Slide Image Placeholder 3"/>
-          <p:cNvSpPr>
-            <a:spLocks noGrp="1" noRot="1" noChangeAspect="1"/>
-          </p:cNvSpPr>
-          <p:nvPr>
-            <p:ph type="sldImg" idx="2"/>
-          </p:nvPr>
-        </p:nvSpPr>
-        <p:spPr>
-          <a:xfrm>
-            <a:off x="685800" y="1143000"/>
-            <a:ext cx="5486400" cy="3086100"/>
-          </a:xfrm>
-          <a:prstGeom prst="rect">
-            <a:avLst/>
-          </a:prstGeom>
-          <a:noFill/>
-          <a:ln w="12700">
-            <a:solidFill>
-              <a:prstClr val="black"/>
-            </a:solidFill>
-          </a:ln>
-        </p:spPr>
-        <p:txBody>
-          <a:bodyPr vert="horz" lIns="91440" tIns="45720" rIns="91440" bIns="45720" rtlCol="0" anchor="ctr"/>
-          <a:lstStyle/>
-          <a:p>
-            <a:endParaRPr lang="en-US"/>
-          </a:p>
-        </p:txBody>
-      </p:sp>
-      <p:sp>
-        <p:nvSpPr>
-          <p:cNvPr id="5" name="Notes Placeholder 4"/>
-          <p:cNvSpPr>
-            <a:spLocks noGrp="1"/>
-          </p:cNvSpPr>
-          <p:nvPr>
-            <p:ph type="body" sz="quarter" idx="3"/>
-          </p:nvPr>
-        </p:nvSpPr>
-        <p:spPr>
-          <a:xfrm>
-            <a:off x="685800" y="4400550"/>
-            <a:ext cx="5486400" cy="3600450"/>
-          </a:xfrm>
-          <a:prstGeom prst="rect">
-            <a:avLst/>
-          </a:prstGeom>
-        </p:spPr>
-        <p:txBody>
-          <a:bodyPr vert="horz" lIns="91440" tIns="45720" rIns="91440" bIns="45720" rtlCol="0"/>
-          <a:lstStyle/>
-          <a:p>
-            <a:pPr lvl="0"/>
-            <a:r>
-              <a:rPr lang="en-US"/>
-              <a:t>Click to edit Master text styles</a:t>
-            </a:r>
-          </a:p>
-          <a:p>
-            <a:pPr lvl="1"/>
-            <a:r>
-              <a:rPr lang="en-US"/>
-              <a:t>Second level</a:t>
-            </a:r>
-          </a:p>
-          <a:p>
-            <a:pPr lvl="2"/>
-            <a:r>
-              <a:rPr lang="en-US"/>
-              <a:t>Third level</a:t>
-            </a:r>
-          </a:p>
-          <a:p>
-            <a:pPr lvl="3"/>
-            <a:r>
-              <a:rPr lang="en-US"/>
-              <a:t>Fourth level</a:t>
-            </a:r>
-          </a:p>
-          <a:p>
-            <a:pPr lvl="4"/>
-            <a:r>
-              <a:rPr lang="en-US"/>
-              <a:t>Fifth level</a:t>
-            </a:r>
-          </a:p>
-        </p:txBody>
-      </p:sp>
-      <p:sp>
-        <p:nvSpPr>
-          <p:cNvPr id="6" name="Footer Placeholder 5"/>
-          <p:cNvSpPr>
-            <a:spLocks noGrp="1"/>
-          </p:cNvSpPr>
-          <p:nvPr>
-            <p:ph type="ftr" sz="quarter" idx="4"/>
-          </p:nvPr>
-        </p:nvSpPr>
-        <p:spPr>
-          <a:xfrm>
-            <a:off x="0" y="8685213"/>
-            <a:ext cx="2971800" cy="458787"/>
-          </a:xfrm>
-          <a:prstGeom prst="rect">
-            <a:avLst/>
-          </a:prstGeom>
-        </p:spPr>
-        <p:txBody>
-          <a:bodyPr vert="horz" lIns="91440" tIns="45720" rIns="91440" bIns="45720" rtlCol="0" anchor="b"/>
-          <a:lstStyle>
-            <a:lvl1pPr algn="l">
-              <a:defRPr sz="1200"/>
-            </a:lvl1pPr>
-          </a:lstStyle>
-          <a:p>
-            <a:endParaRPr lang="en-US"/>
-          </a:p>
-        </p:txBody>
-      </p:sp>
-      <p:sp>
-        <p:nvSpPr>
-          <p:cNvPr id="7" name="Slide Number Placeholder 6"/>
-          <p:cNvSpPr>
-            <a:spLocks noGrp="1"/>
-          </p:cNvSpPr>
-          <p:nvPr>
-            <p:ph type="sldNum" sz="quarter" idx="5"/>
-          </p:nvPr>
-        </p:nvSpPr>
-        <p:spPr>
-          <a:xfrm>
-            <a:off x="3884613" y="8685213"/>
-            <a:ext cx="2971800" cy="458787"/>
-          </a:xfrm>
-          <a:prstGeom prst="rect">
-            <a:avLst/>
-          </a:prstGeom>
-        </p:spPr>
-        <p:txBody>
-          <a:bodyPr vert="horz" lIns="91440" tIns="45720" rIns="91440" bIns="45720" rtlCol="0" anchor="b"/>
-          <a:lstStyle>
-            <a:lvl1pPr algn="r">
-              <a:defRPr sz="1200"/>
-            </a:lvl1pPr>
-          </a:lstStyle>
-          <a:p>
-            <a:fld id="{CE5E9CC1-C706-0F49-92D6-E571CC5EEA8F}" type="slidenum">
-              <a:rPr lang="en-US"/>
-              <a:t>‹#›</a:t>
-            </a:fld>
-            <a:endParaRPr lang="en-US"/>
-          </a:p>
-        </p:txBody>
-      </p:sp>
     </p:spTree>
     <p:extLst>
       <p:ext uri="{BB962C8B-B14F-4D97-AF65-F5344CB8AC3E}">
-        <p14:creationId xmlns:p14="http://schemas.microsoft.com/office/powerpoint/2010/main" val="1024086991"/>
+        <p14:creationId xmlns:p14="http://schemas.microsoft.com/office/powerpoint/2010/main" val="3573609217"/>
       </p:ext>
     </p:extLst>
   </p:cSld>
@@ -510,7 +291,6 @@
               <a:rPr lang="en-US" dirty="0"/>
               <a:t>Hi, I'm Luis. My project asks a simple question about graph neural networks: which edges in a graph should the model actually trust? I want to answer it with a Bayesian model that uses an LLM to read the node texts, so we get not just a decision but uncertainty about each edge.</a:t>
             </a:r>
-            <a:endParaRPr lang="en-US" dirty="0"/>
           </a:p>
         </p:txBody>
       </p:sp>
@@ -598,7 +378,6 @@
               <a:rPr lang="en-US" dirty="0"/>
               <a:t>GNNs work by passing messages along edges, and they assume every neighbor is reliable. In practice edges can be noisy or deliberately injected, and an attacker can add edges between nodes whose texts look related, so the fake edges are hard to spot. We have two kinds of evidence about each edge, the graph structure and the node texts, and an LLM can read the texts and judge whether a link makes sense, but its judgments are noisy and current defenses combine these signals with hand-made rules. My goal is to treat each edge's reliability as a hidden variable and infer it the Bayesian way.</a:t>
             </a:r>
-            <a:endParaRPr lang="en-US" dirty="0"/>
           </a:p>
         </p:txBody>
       </p:sp>
@@ -686,7 +465,6 @@
               <a:rPr lang="en-US" dirty="0"/>
               <a:t>I'll use four standard graphs where every node has text: Cora, CiteSeer and PubMed are citation networks of papers, and WikiCS is a network of Wikipedia computer science articles. Each node has its raw text, a topic label, and citation or hyperlink edges. To study unreliable edges, I'll inject fake edges between nodes whose texts look related, from 5 to 40 percent of the edge count, and have an LLM read both endpoint texts of every edge and rate whether the link makes sense, with SBERT similarity as a cheaper baseline. Because I inject the edges myself, I know exactly which ones are fake.</a:t>
             </a:r>
-            <a:endParaRPr lang="en-US" dirty="0"/>
           </a:p>
         </p:txBody>
       </p:sp>
@@ -774,7 +552,6 @@
               <a:rPr lang="en-US" dirty="0"/>
               <a:t>The core of the model is Bayes' rule, applied to every edge. The hidden question is whether the edge is real or injected. The prior comes from text: an LLM reads both nodes' texts and rates whether the link makes sense, and I treat that rating as noisy evidence rather than truth. The likelihood comes from structure: whether the two endpoints' representations agree during propagation. Multiplying them gives a posterior probability that the edge is real, with uncertainty. The GNN then weights each message by that posterior, its own weights get an approximate posterior too, and the result is node predictions with uncertainty.</a:t>
             </a:r>
-            <a:endParaRPr lang="en-US" dirty="0"/>
           </a:p>
         </p:txBody>
       </p:sp>
@@ -862,7 +639,6 @@
               <a:rPr lang="en-US" dirty="0"/>
               <a:t>Three hypotheses. One: combining the text prior with the structural likelihood finds injected edges better than either source alone, measured by AUROC. Two: a Bayesian GNN should be more uncertain on the nodes that received fake edges, and stay better calibrated as the attack grows. Three: an LLM that reads both texts should give a better prior than plain embedding similarity, and the gain should be biggest on graphs where the text predicts the labels well.</a:t>
             </a:r>
-            <a:endParaRPr lang="en-US" dirty="0"/>
           </a:p>
         </p:txBody>
       </p:sp>
@@ -950,7 +726,6 @@
               <a:rPr lang="en-US" dirty="0"/>
               <a:t>What makes this testable is that I inject the fake edges myself, so I know the true answer for every edge. That means I can check the edge posteriors directly against ground truth, at every attack size from 5 to 40 percent, instead of only looking at final accuracy.</a:t>
             </a:r>
-            <a:endParaRPr lang="en-US" dirty="0"/>
           </a:p>
         </p:txBody>
       </p:sp>
@@ -1038,7 +813,6 @@
               <a:rPr lang="en-US" dirty="0"/>
               <a:t>To trust the results, I'll first simulate graphs where I control which edges are fake and check that the posterior recovers them. Then I'll compare fake-edge detection using the LLM only, structure only and both, check how well calibrated the LLM's ratings are, check calibration with reliability diagrams on clean and attacked graphs, run a posterior predictive check on label agreement along edges, and compare three ways of approximating the posterior. I'm looking for one or two teammates interested in graph learning, LLMs or Bayesian modeling. Thanks!</a:t>
             </a:r>
-            <a:endParaRPr lang="en-US" dirty="0"/>
           </a:p>
         </p:txBody>
       </p:sp>
@@ -1111,6 +885,11 @@
 <file path=ppt/slideMasters/slideMaster1.xml><?xml version="1.0" encoding="utf-8"?>
 <p:sldMaster xmlns:a="http://schemas.openxmlformats.org/drawingml/2006/main" xmlns:r="http://schemas.openxmlformats.org/officeDocument/2006/relationships" xmlns:p="http://schemas.openxmlformats.org/presentationml/2006/main">
   <p:cSld>
+    <p:bg>
+      <p:bgRef idx="1001">
+        <a:schemeClr val="bg1"/>
+      </p:bgRef>
+    </p:bg>
     <p:spTree>
       <p:nvGrpSpPr>
         <p:cNvPr id="1" name=""/>
@@ -1393,6 +1172,7 @@
         <a:solidFill>
           <a:srgbClr val="14213D"/>
         </a:solidFill>
+        <a:effectLst/>
       </p:bgPr>
     </p:bg>
     <p:spTree>
@@ -1430,11 +1210,11 @@
           <a:bodyPr wrap="square" lIns="0" tIns="0" rIns="0" bIns="0" rtlCol="0" anchor="ctr"/>
           <a:lstStyle/>
           <a:p>
-            <a:pPr indent="0" marL="0">
-              <a:buNone/>
-            </a:pPr>
-            <a:r>
-              <a:rPr lang="en-US" sz="1400" b="1" spc="400" kern="0" dirty="0">
+            <a:pPr marL="0" indent="0">
+              <a:buNone/>
+            </a:pPr>
+            <a:r>
+              <a:rPr lang="en-US" sz="1400" b="1" kern="0" spc="400" dirty="0">
                 <a:solidFill>
                   <a:srgbClr val="F2A65A"/>
                 </a:solidFill>
@@ -1469,7 +1249,7 @@
           <a:bodyPr wrap="square" lIns="0" tIns="0" rIns="0" bIns="0" rtlCol="0" anchor="t"/>
           <a:lstStyle/>
           <a:p>
-            <a:pPr indent="0" marL="0">
+            <a:pPr marL="0" indent="0">
               <a:buNone/>
             </a:pPr>
             <a:r>
@@ -1508,7 +1288,7 @@
           <a:bodyPr wrap="square" lIns="0" tIns="0" rIns="0" bIns="0" rtlCol="0" anchor="t"/>
           <a:lstStyle/>
           <a:p>
-            <a:pPr indent="0" marL="0">
+            <a:pPr marL="0" indent="0">
               <a:buNone/>
             </a:pPr>
             <a:r>
@@ -1547,7 +1327,7 @@
           <a:bodyPr wrap="square" lIns="0" tIns="0" rIns="0" bIns="0" rtlCol="0" anchor="ctr"/>
           <a:lstStyle/>
           <a:p>
-            <a:pPr indent="0" marL="0">
+            <a:pPr marL="0" indent="0">
               <a:buNone/>
             </a:pPr>
             <a:r>
@@ -1589,17 +1369,24 @@
             <a:prstDash val="solid"/>
           </a:ln>
         </p:spPr>
+        <p:txBody>
+          <a:bodyPr/>
+          <a:lstStyle/>
+          <a:p>
+            <a:endParaRPr lang="en-US"/>
+          </a:p>
+        </p:txBody>
       </p:sp>
       <p:pic>
         <p:nvPicPr>
-          <p:cNvPr id="7" name="Image 0" descr="preencoded.png">    </p:cNvPr>
+          <p:cNvPr id="7" name="Image 0" descr="preencoded.png"/>
           <p:cNvPicPr>
             <a:picLocks noChangeAspect="1"/>
           </p:cNvPicPr>
           <p:nvPr/>
         </p:nvPicPr>
         <p:blipFill>
-          <a:blip r:embed="rId1"/>
+          <a:blip r:embed="rId3"/>
           <a:stretch>
             <a:fillRect/>
           </a:stretch>
@@ -1630,6 +1417,7 @@
         <a:solidFill>
           <a:srgbClr val="FFFFFF"/>
         </a:solidFill>
+        <a:effectLst/>
       </p:bgPr>
     </p:bg>
     <p:spTree>
@@ -1667,7 +1455,7 @@
           <a:bodyPr wrap="square" lIns="0" tIns="0" rIns="0" bIns="0" rtlCol="0" anchor="ctr"/>
           <a:lstStyle/>
           <a:p>
-            <a:pPr indent="0" marL="0">
+            <a:pPr marL="0" indent="0">
               <a:buNone/>
             </a:pPr>
             <a:r>
@@ -1706,7 +1494,7 @@
           <a:bodyPr wrap="square" lIns="0" tIns="0" rIns="0" bIns="0" rtlCol="0" anchor="t"/>
           <a:lstStyle/>
           <a:p>
-            <a:pPr indent="0" marL="0">
+            <a:pPr marL="0" indent="0">
               <a:buNone/>
             </a:pPr>
             <a:r>
@@ -1750,6 +1538,13 @@
             <a:prstDash val="solid"/>
           </a:ln>
         </p:spPr>
+        <p:txBody>
+          <a:bodyPr/>
+          <a:lstStyle/>
+          <a:p>
+            <a:endParaRPr lang="en-US"/>
+          </a:p>
+        </p:txBody>
       </p:sp>
       <p:sp>
         <p:nvSpPr>
@@ -1772,14 +1567,14 @@
           <a:bodyPr wrap="square" lIns="0" tIns="0" rIns="0" bIns="0" rtlCol="0" anchor="t"/>
           <a:lstStyle/>
           <a:p>
-            <a:pPr indent="0" marL="0">
+            <a:pPr marL="0" indent="0">
               <a:spcAft>
                 <a:spcPts val="600"/>
               </a:spcAft>
               <a:buNone/>
             </a:pPr>
             <a:r>
-              <a:rPr lang="en-US" sz="1300" b="1" spc="300" kern="0" dirty="0">
+              <a:rPr lang="en-US" sz="1300" b="1" kern="0" spc="300" dirty="0">
                 <a:solidFill>
                   <a:srgbClr val="B4540A"/>
                 </a:solidFill>
@@ -1792,7 +1587,7 @@
             <a:endParaRPr lang="en-US" sz="1300" dirty="0"/>
           </a:p>
           <a:p>
-            <a:pPr indent="0" marL="0">
+            <a:pPr marL="0" indent="0">
               <a:spcAft>
                 <a:spcPts val="600"/>
               </a:spcAft>
@@ -1837,17 +1632,24 @@
             <a:prstDash val="solid"/>
           </a:ln>
         </p:spPr>
+        <p:txBody>
+          <a:bodyPr/>
+          <a:lstStyle/>
+          <a:p>
+            <a:endParaRPr lang="en-US"/>
+          </a:p>
+        </p:txBody>
       </p:sp>
       <p:pic>
         <p:nvPicPr>
-          <p:cNvPr id="7" name="Image 0" descr="preencoded.png">    </p:cNvPr>
+          <p:cNvPr id="7" name="Image 0" descr="preencoded.png"/>
           <p:cNvPicPr>
             <a:picLocks noChangeAspect="1"/>
           </p:cNvPicPr>
           <p:nvPr/>
         </p:nvPicPr>
         <p:blipFill>
-          <a:blip r:embed="rId1"/>
+          <a:blip r:embed="rId3"/>
           <a:stretch>
             <a:fillRect/>
           </a:stretch>
@@ -1883,7 +1685,7 @@
           <a:bodyPr wrap="square" lIns="0" tIns="0" rIns="0" bIns="0" rtlCol="0" anchor="t"/>
           <a:lstStyle/>
           <a:p>
-            <a:pPr indent="0" marL="0">
+            <a:pPr marL="0" indent="0">
               <a:spcAft>
                 <a:spcPts val="400"/>
               </a:spcAft>
@@ -1903,7 +1705,7 @@
             <a:endParaRPr lang="en-US" sz="1800" dirty="0"/>
           </a:p>
           <a:p>
-            <a:pPr indent="0" marL="0">
+            <a:pPr marL="0" indent="0">
               <a:spcAft>
                 <a:spcPts val="400"/>
               </a:spcAft>
@@ -1948,17 +1750,24 @@
             <a:prstDash val="solid"/>
           </a:ln>
         </p:spPr>
+        <p:txBody>
+          <a:bodyPr/>
+          <a:lstStyle/>
+          <a:p>
+            <a:endParaRPr lang="en-US"/>
+          </a:p>
+        </p:txBody>
       </p:sp>
       <p:pic>
         <p:nvPicPr>
-          <p:cNvPr id="10" name="Image 1" descr="preencoded.png">    </p:cNvPr>
+          <p:cNvPr id="10" name="Image 1" descr="preencoded.png"/>
           <p:cNvPicPr>
             <a:picLocks noChangeAspect="1"/>
           </p:cNvPicPr>
           <p:nvPr/>
         </p:nvPicPr>
         <p:blipFill>
-          <a:blip r:embed="rId2"/>
+          <a:blip r:embed="rId4"/>
           <a:stretch>
             <a:fillRect/>
           </a:stretch>
@@ -1994,7 +1803,7 @@
           <a:bodyPr wrap="square" lIns="0" tIns="0" rIns="0" bIns="0" rtlCol="0" anchor="t"/>
           <a:lstStyle/>
           <a:p>
-            <a:pPr indent="0" marL="0">
+            <a:pPr marL="0" indent="0">
               <a:spcAft>
                 <a:spcPts val="400"/>
               </a:spcAft>
@@ -2014,7 +1823,7 @@
             <a:endParaRPr lang="en-US" sz="1800" dirty="0"/>
           </a:p>
           <a:p>
-            <a:pPr indent="0" marL="0">
+            <a:pPr marL="0" indent="0">
               <a:spcAft>
                 <a:spcPts val="400"/>
               </a:spcAft>
@@ -2059,17 +1868,24 @@
             <a:prstDash val="solid"/>
           </a:ln>
         </p:spPr>
+        <p:txBody>
+          <a:bodyPr/>
+          <a:lstStyle/>
+          <a:p>
+            <a:endParaRPr lang="en-US"/>
+          </a:p>
+        </p:txBody>
       </p:sp>
       <p:pic>
         <p:nvPicPr>
-          <p:cNvPr id="13" name="Image 2" descr="preencoded.png">    </p:cNvPr>
+          <p:cNvPr id="13" name="Image 2" descr="preencoded.png"/>
           <p:cNvPicPr>
             <a:picLocks noChangeAspect="1"/>
           </p:cNvPicPr>
           <p:nvPr/>
         </p:nvPicPr>
         <p:blipFill>
-          <a:blip r:embed="rId3"/>
+          <a:blip r:embed="rId5"/>
           <a:stretch>
             <a:fillRect/>
           </a:stretch>
@@ -2105,7 +1921,7 @@
           <a:bodyPr wrap="square" lIns="0" tIns="0" rIns="0" bIns="0" rtlCol="0" anchor="t"/>
           <a:lstStyle/>
           <a:p>
-            <a:pPr indent="0" marL="0">
+            <a:pPr marL="0" indent="0">
               <a:spcAft>
                 <a:spcPts val="400"/>
               </a:spcAft>
@@ -2125,7 +1941,7 @@
             <a:endParaRPr lang="en-US" sz="1800" dirty="0"/>
           </a:p>
           <a:p>
-            <a:pPr indent="0" marL="0">
+            <a:pPr marL="0" indent="0">
               <a:spcAft>
                 <a:spcPts val="400"/>
               </a:spcAft>
@@ -2167,7 +1983,7 @@
           <a:bodyPr wrap="square" lIns="0" tIns="0" rIns="0" bIns="0" rtlCol="0" anchor="ctr"/>
           <a:lstStyle/>
           <a:p>
-            <a:pPr indent="0" marL="0">
+            <a:pPr marL="0" indent="0">
               <a:buNone/>
             </a:pPr>
             <a:r>
@@ -2206,7 +2022,7 @@
           <a:bodyPr wrap="square" lIns="0" tIns="0" rIns="0" bIns="0" rtlCol="0" anchor="ctr"/>
           <a:lstStyle/>
           <a:p>
-            <a:pPr algn="r" indent="0" marL="0">
+            <a:pPr marL="0" indent="0" algn="r">
               <a:buNone/>
             </a:pPr>
             <a:r>
@@ -2240,6 +2056,7 @@
         <a:solidFill>
           <a:srgbClr val="FFFFFF"/>
         </a:solidFill>
+        <a:effectLst/>
       </p:bgPr>
     </p:bg>
     <p:spTree>
@@ -2277,7 +2094,7 @@
           <a:bodyPr wrap="square" lIns="0" tIns="0" rIns="0" bIns="0" rtlCol="0" anchor="ctr"/>
           <a:lstStyle/>
           <a:p>
-            <a:pPr indent="0" marL="0">
+            <a:pPr marL="0" indent="0">
               <a:buNone/>
             </a:pPr>
             <a:r>
@@ -2316,7 +2133,7 @@
           <a:bodyPr wrap="square" lIns="0" tIns="0" rIns="0" bIns="0" rtlCol="0" anchor="ctr"/>
           <a:lstStyle/>
           <a:p>
-            <a:pPr indent="0" marL="0">
+            <a:pPr marL="0" indent="0">
               <a:buNone/>
             </a:pPr>
             <a:r>
@@ -2355,7 +2172,7 @@
           <a:bodyPr wrap="square" lIns="0" tIns="0" rIns="0" bIns="0" rtlCol="0" anchor="t"/>
           <a:lstStyle/>
           <a:p>
-            <a:pPr indent="0" marL="0">
+            <a:pPr marL="0" indent="0">
               <a:buNone/>
             </a:pPr>
             <a:r>
@@ -2372,7 +2189,7 @@
             <a:endParaRPr lang="en-US" sz="1400" dirty="0"/>
           </a:p>
           <a:p>
-            <a:pPr indent="0" marL="0">
+            <a:pPr marL="0" indent="0">
               <a:buNone/>
             </a:pPr>
             <a:r>
@@ -2411,7 +2228,7 @@
           <a:bodyPr wrap="square" lIns="0" tIns="0" rIns="0" bIns="0" rtlCol="0" anchor="ctr"/>
           <a:lstStyle/>
           <a:p>
-            <a:pPr indent="0" marL="0">
+            <a:pPr marL="0" indent="0">
               <a:buNone/>
             </a:pPr>
             <a:r>
@@ -2450,7 +2267,7 @@
           <a:bodyPr wrap="square" lIns="0" tIns="0" rIns="0" bIns="0" rtlCol="0" anchor="t"/>
           <a:lstStyle/>
           <a:p>
-            <a:pPr indent="0" marL="0">
+            <a:pPr marL="0" indent="0">
               <a:buNone/>
             </a:pPr>
             <a:r>
@@ -2467,7 +2284,7 @@
             <a:endParaRPr lang="en-US" sz="1400" dirty="0"/>
           </a:p>
           <a:p>
-            <a:pPr indent="0" marL="0">
+            <a:pPr marL="0" indent="0">
               <a:buNone/>
             </a:pPr>
             <a:r>
@@ -2506,7 +2323,7 @@
           <a:bodyPr wrap="square" lIns="0" tIns="0" rIns="0" bIns="0" rtlCol="0" anchor="ctr"/>
           <a:lstStyle/>
           <a:p>
-            <a:pPr indent="0" marL="0">
+            <a:pPr marL="0" indent="0">
               <a:buNone/>
             </a:pPr>
             <a:r>
@@ -2545,7 +2362,7 @@
           <a:bodyPr wrap="square" lIns="0" tIns="0" rIns="0" bIns="0" rtlCol="0" anchor="t"/>
           <a:lstStyle/>
           <a:p>
-            <a:pPr indent="0" marL="0">
+            <a:pPr marL="0" indent="0">
               <a:buNone/>
             </a:pPr>
             <a:r>
@@ -2562,7 +2379,7 @@
             <a:endParaRPr lang="en-US" sz="1400" dirty="0"/>
           </a:p>
           <a:p>
-            <a:pPr indent="0" marL="0">
+            <a:pPr marL="0" indent="0">
               <a:buNone/>
             </a:pPr>
             <a:r>
@@ -2601,7 +2418,7 @@
           <a:bodyPr wrap="square" lIns="0" tIns="0" rIns="0" bIns="0" rtlCol="0" anchor="ctr"/>
           <a:lstStyle/>
           <a:p>
-            <a:pPr indent="0" marL="0">
+            <a:pPr marL="0" indent="0">
               <a:buNone/>
             </a:pPr>
             <a:r>
@@ -2640,7 +2457,7 @@
           <a:bodyPr wrap="square" lIns="0" tIns="0" rIns="0" bIns="0" rtlCol="0" anchor="t"/>
           <a:lstStyle/>
           <a:p>
-            <a:pPr indent="0" marL="0">
+            <a:pPr marL="0" indent="0">
               <a:buNone/>
             </a:pPr>
             <a:r>
@@ -2657,7 +2474,7 @@
             <a:endParaRPr lang="en-US" sz="1400" dirty="0"/>
           </a:p>
           <a:p>
-            <a:pPr indent="0" marL="0">
+            <a:pPr marL="0" indent="0">
               <a:buNone/>
             </a:pPr>
             <a:r>
@@ -2701,6 +2518,13 @@
             <a:prstDash val="solid"/>
           </a:ln>
         </p:spPr>
+        <p:txBody>
+          <a:bodyPr/>
+          <a:lstStyle/>
+          <a:p>
+            <a:endParaRPr lang="en-US"/>
+          </a:p>
+        </p:txBody>
       </p:sp>
       <p:sp>
         <p:nvSpPr>
@@ -2723,7 +2547,7 @@
           <a:bodyPr wrap="square" lIns="0" tIns="0" rIns="0" bIns="0" rtlCol="0" anchor="ctr"/>
           <a:lstStyle/>
           <a:p>
-            <a:pPr indent="0" marL="0">
+            <a:pPr marL="0" indent="0">
               <a:buNone/>
             </a:pPr>
             <a:r>
@@ -2873,6 +2697,13 @@
             <a:prstDash val="solid"/>
           </a:ln>
         </p:spPr>
+        <p:txBody>
+          <a:bodyPr/>
+          <a:lstStyle/>
+          <a:p>
+            <a:endParaRPr lang="en-US"/>
+          </a:p>
+        </p:txBody>
       </p:sp>
       <p:sp>
         <p:nvSpPr>
@@ -2895,7 +2726,7 @@
           <a:bodyPr wrap="square" lIns="0" tIns="0" rIns="0" bIns="0" rtlCol="0" anchor="ctr"/>
           <a:lstStyle/>
           <a:p>
-            <a:pPr indent="0" marL="0">
+            <a:pPr marL="0" indent="0">
               <a:buNone/>
             </a:pPr>
             <a:r>
@@ -2934,7 +2765,7 @@
           <a:bodyPr wrap="square" lIns="0" tIns="0" rIns="0" bIns="0" rtlCol="0" anchor="t"/>
           <a:lstStyle/>
           <a:p>
-            <a:pPr indent="0" marL="0">
+            <a:pPr marL="0" indent="0">
               <a:spcAft>
                 <a:spcPts val="1000"/>
               </a:spcAft>
@@ -2954,7 +2785,7 @@
             <a:endParaRPr lang="en-US" sz="1600" dirty="0"/>
           </a:p>
           <a:p>
-            <a:pPr indent="0" marL="0">
+            <a:pPr marL="0" indent="0">
               <a:spcAft>
                 <a:spcPts val="1000"/>
               </a:spcAft>
@@ -2974,7 +2805,7 @@
             <a:endParaRPr lang="en-US" sz="1600" dirty="0"/>
           </a:p>
           <a:p>
-            <a:pPr indent="0" marL="0">
+            <a:pPr marL="0" indent="0">
               <a:spcAft>
                 <a:spcPts val="1000"/>
               </a:spcAft>
@@ -3016,7 +2847,7 @@
           <a:bodyPr wrap="square" lIns="0" tIns="0" rIns="0" bIns="0" rtlCol="0" anchor="ctr"/>
           <a:lstStyle/>
           <a:p>
-            <a:pPr indent="0" marL="0">
+            <a:pPr marL="0" indent="0">
               <a:buNone/>
             </a:pPr>
             <a:r>
@@ -3055,7 +2886,7 @@
           <a:bodyPr wrap="square" lIns="0" tIns="0" rIns="0" bIns="0" rtlCol="0" anchor="ctr"/>
           <a:lstStyle/>
           <a:p>
-            <a:pPr indent="0" marL="0">
+            <a:pPr marL="0" indent="0">
               <a:buNone/>
             </a:pPr>
             <a:r>
@@ -3094,7 +2925,7 @@
           <a:bodyPr wrap="square" lIns="0" tIns="0" rIns="0" bIns="0" rtlCol="0" anchor="ctr"/>
           <a:lstStyle/>
           <a:p>
-            <a:pPr algn="r" indent="0" marL="0">
+            <a:pPr marL="0" indent="0" algn="r">
               <a:buNone/>
             </a:pPr>
             <a:r>
@@ -3128,6 +2959,7 @@
         <a:solidFill>
           <a:srgbClr val="F4F5F8"/>
         </a:solidFill>
+        <a:effectLst/>
       </p:bgPr>
     </p:bg>
     <p:spTree>
@@ -3165,7 +2997,7 @@
           <a:bodyPr wrap="square" lIns="0" tIns="0" rIns="0" bIns="0" rtlCol="0" anchor="ctr"/>
           <a:lstStyle/>
           <a:p>
-            <a:pPr indent="0" marL="0">
+            <a:pPr marL="0" indent="0">
               <a:buNone/>
             </a:pPr>
             <a:r>
@@ -3204,7 +3036,7 @@
           <a:bodyPr wrap="square" lIns="0" tIns="0" rIns="0" bIns="0" rtlCol="0" anchor="ctr"/>
           <a:lstStyle/>
           <a:p>
-            <a:pPr indent="0" marL="0">
+            <a:pPr marL="0" indent="0">
               <a:buNone/>
             </a:pPr>
             <a:r>
@@ -3218,9 +3050,6 @@
               </a:rPr>
               <a:t>Hidden question for each edge: is it real (</a:t>
             </a:r>
-            <a:pPr indent="0" marL="0">
-              <a:buNone/>
-            </a:pPr>
             <a:r>
               <a:rPr lang="en-US" sz="1600" i="1" dirty="0">
                 <a:solidFill>
@@ -3232,9 +3061,6 @@
               </a:rPr>
               <a:t>z</a:t>
             </a:r>
-            <a:pPr indent="0" marL="0">
-              <a:buNone/>
-            </a:pPr>
             <a:r>
               <a:rPr lang="en-US" sz="1600" i="1" baseline="-40000" dirty="0">
                 <a:solidFill>
@@ -3246,9 +3072,6 @@
               </a:rPr>
               <a:t>ij</a:t>
             </a:r>
-            <a:pPr indent="0" marL="0">
-              <a:buNone/>
-            </a:pPr>
             <a:r>
               <a:rPr lang="en-US" sz="1600" dirty="0">
                 <a:solidFill>
@@ -3258,11 +3081,30 @@
                 <a:ea typeface="Calibri" pitchFamily="34" charset="-122"/>
                 <a:cs typeface="Calibri" pitchFamily="34" charset="-120"/>
               </a:rPr>
-              <a:t> </a:t>
-            </a:r>
-            <a:pPr indent="0" marL="0">
-              <a:buNone/>
-            </a:pPr>
+              <a:t>  = 1) or injected (</a:t>
+            </a:r>
+            <a:r>
+              <a:rPr lang="en-US" sz="1600" i="1" dirty="0">
+                <a:solidFill>
+                  <a:srgbClr val="4A5568"/>
+                </a:solidFill>
+                <a:latin typeface="Calibri" pitchFamily="34" charset="0"/>
+                <a:ea typeface="Calibri" pitchFamily="34" charset="-122"/>
+                <a:cs typeface="Calibri" pitchFamily="34" charset="-120"/>
+              </a:rPr>
+              <a:t>z</a:t>
+            </a:r>
+            <a:r>
+              <a:rPr lang="en-US" sz="1600" i="1" baseline="-40000" dirty="0">
+                <a:solidFill>
+                  <a:srgbClr val="4A5568"/>
+                </a:solidFill>
+                <a:latin typeface="Calibri" pitchFamily="34" charset="0"/>
+                <a:ea typeface="Calibri" pitchFamily="34" charset="-122"/>
+                <a:cs typeface="Calibri" pitchFamily="34" charset="-120"/>
+              </a:rPr>
+              <a:t>ij</a:t>
+            </a:r>
             <a:r>
               <a:rPr lang="en-US" sz="1600" dirty="0">
                 <a:solidFill>
@@ -3272,63 +3114,7 @@
                 <a:ea typeface="Calibri" pitchFamily="34" charset="-122"/>
                 <a:cs typeface="Calibri" pitchFamily="34" charset="-120"/>
               </a:rPr>
-              <a:t> = 1) or injected (</a:t>
-            </a:r>
-            <a:pPr indent="0" marL="0">
-              <a:buNone/>
-            </a:pPr>
-            <a:r>
-              <a:rPr lang="en-US" sz="1600" i="1" dirty="0">
-                <a:solidFill>
-                  <a:srgbClr val="4A5568"/>
-                </a:solidFill>
-                <a:latin typeface="Calibri" pitchFamily="34" charset="0"/>
-                <a:ea typeface="Calibri" pitchFamily="34" charset="-122"/>
-                <a:cs typeface="Calibri" pitchFamily="34" charset="-120"/>
-              </a:rPr>
-              <a:t>z</a:t>
-            </a:r>
-            <a:pPr indent="0" marL="0">
-              <a:buNone/>
-            </a:pPr>
-            <a:r>
-              <a:rPr lang="en-US" sz="1600" i="1" baseline="-40000" dirty="0">
-                <a:solidFill>
-                  <a:srgbClr val="4A5568"/>
-                </a:solidFill>
-                <a:latin typeface="Calibri" pitchFamily="34" charset="0"/>
-                <a:ea typeface="Calibri" pitchFamily="34" charset="-122"/>
-                <a:cs typeface="Calibri" pitchFamily="34" charset="-120"/>
-              </a:rPr>
-              <a:t>ij</a:t>
-            </a:r>
-            <a:pPr indent="0" marL="0">
-              <a:buNone/>
-            </a:pPr>
-            <a:r>
-              <a:rPr lang="en-US" sz="1600" dirty="0">
-                <a:solidFill>
-                  <a:srgbClr val="4A5568"/>
-                </a:solidFill>
-                <a:latin typeface="Calibri" pitchFamily="34" charset="0"/>
-                <a:ea typeface="Calibri" pitchFamily="34" charset="-122"/>
-                <a:cs typeface="Calibri" pitchFamily="34" charset="-120"/>
-              </a:rPr>
-              <a:t> </a:t>
-            </a:r>
-            <a:pPr indent="0" marL="0">
-              <a:buNone/>
-            </a:pPr>
-            <a:r>
-              <a:rPr lang="en-US" sz="1600" dirty="0">
-                <a:solidFill>
-                  <a:srgbClr val="4A5568"/>
-                </a:solidFill>
-                <a:latin typeface="Calibri" pitchFamily="34" charset="0"/>
-                <a:ea typeface="Calibri" pitchFamily="34" charset="-122"/>
-                <a:cs typeface="Calibri" pitchFamily="34" charset="-120"/>
-              </a:rPr>
-              <a:t> = 0)?</a:t>
+              <a:t>  = 0)?</a:t>
             </a:r>
             <a:endParaRPr lang="en-US" sz="1600" dirty="0"/>
           </a:p>
@@ -3360,13 +3146,20 @@
             <a:prstDash val="solid"/>
           </a:ln>
           <a:effectLst>
-            <a:outerShdw sx="100000" sy="100000" kx="0" ky="0" algn="bl" rotWithShape="0" blurRad="76200" dist="25400" dir="5400000">
+            <a:outerShdw blurRad="76200" dist="25400" dir="5400000" algn="bl" rotWithShape="0">
               <a:srgbClr val="000000">
                 <a:alpha val="8000"/>
               </a:srgbClr>
             </a:outerShdw>
           </a:effectLst>
         </p:spPr>
+        <p:txBody>
+          <a:bodyPr/>
+          <a:lstStyle/>
+          <a:p>
+            <a:endParaRPr lang="en-US"/>
+          </a:p>
+        </p:txBody>
       </p:sp>
       <p:sp>
         <p:nvSpPr>
@@ -3392,17 +3185,24 @@
             <a:prstDash val="solid"/>
           </a:ln>
         </p:spPr>
+        <p:txBody>
+          <a:bodyPr/>
+          <a:lstStyle/>
+          <a:p>
+            <a:endParaRPr lang="en-US"/>
+          </a:p>
+        </p:txBody>
       </p:sp>
       <p:pic>
         <p:nvPicPr>
-          <p:cNvPr id="6" name="Image 0" descr="preencoded.png">    </p:cNvPr>
+          <p:cNvPr id="6" name="Image 0" descr="preencoded.png"/>
           <p:cNvPicPr>
             <a:picLocks noChangeAspect="1"/>
           </p:cNvPicPr>
           <p:nvPr/>
         </p:nvPicPr>
         <p:blipFill>
-          <a:blip r:embed="rId1"/>
+          <a:blip r:embed="rId3"/>
           <a:stretch>
             <a:fillRect/>
           </a:stretch>
@@ -3438,11 +3238,11 @@
           <a:bodyPr wrap="square" lIns="0" tIns="0" rIns="0" bIns="0" rtlCol="0" anchor="ctr"/>
           <a:lstStyle/>
           <a:p>
-            <a:pPr indent="0" marL="0">
-              <a:buNone/>
-            </a:pPr>
-            <a:r>
-              <a:rPr lang="en-US" sz="1200" b="1" spc="150" kern="0" dirty="0">
+            <a:pPr marL="0" indent="0">
+              <a:buNone/>
+            </a:pPr>
+            <a:r>
+              <a:rPr lang="en-US" sz="1200" b="1" kern="0" spc="150" dirty="0">
                 <a:solidFill>
                   <a:srgbClr val="B4540A"/>
                 </a:solidFill>
@@ -3477,7 +3277,7 @@
           <a:bodyPr wrap="square" lIns="0" tIns="0" rIns="0" bIns="0" rtlCol="0" anchor="ctr"/>
           <a:lstStyle/>
           <a:p>
-            <a:pPr indent="0" marL="0">
+            <a:pPr marL="0" indent="0">
               <a:buNone/>
             </a:pPr>
             <a:r>
@@ -3491,9 +3291,6 @@
               </a:rPr>
               <a:t>p(</a:t>
             </a:r>
-            <a:pPr indent="0" marL="0">
-              <a:buNone/>
-            </a:pPr>
             <a:r>
               <a:rPr lang="en-US" sz="2000" i="1" dirty="0">
                 <a:solidFill>
@@ -3505,9 +3302,6 @@
               </a:rPr>
               <a:t>z</a:t>
             </a:r>
-            <a:pPr indent="0" marL="0">
-              <a:buNone/>
-            </a:pPr>
             <a:r>
               <a:rPr lang="en-US" sz="2000" i="1" baseline="-40000" dirty="0">
                 <a:solidFill>
@@ -3519,9 +3313,6 @@
               </a:rPr>
               <a:t>ij</a:t>
             </a:r>
-            <a:pPr indent="0" marL="0">
-              <a:buNone/>
-            </a:pPr>
             <a:r>
               <a:rPr lang="en-US" sz="2000" dirty="0">
                 <a:solidFill>
@@ -3531,13 +3322,10 @@
                 <a:ea typeface="Cambria Math" pitchFamily="34" charset="-122"/>
                 <a:cs typeface="Cambria Math" pitchFamily="34" charset="-120"/>
               </a:rPr>
-              <a:t> </a:t>
-            </a:r>
-            <a:pPr indent="0" marL="0">
-              <a:buNone/>
-            </a:pPr>
-            <a:r>
-              <a:rPr lang="en-US" sz="2000" dirty="0">
+              <a:t>  = 1 | </a:t>
+            </a:r>
+            <a:r>
+              <a:rPr lang="en-US" sz="2000" i="1" dirty="0">
                 <a:solidFill>
                   <a:srgbClr val="14213D"/>
                 </a:solidFill>
@@ -3545,13 +3333,10 @@
                 <a:ea typeface="Cambria Math" pitchFamily="34" charset="-122"/>
                 <a:cs typeface="Cambria Math" pitchFamily="34" charset="-120"/>
               </a:rPr>
-              <a:t> = 1 | </a:t>
-            </a:r>
-            <a:pPr indent="0" marL="0">
-              <a:buNone/>
-            </a:pPr>
-            <a:r>
-              <a:rPr lang="en-US" sz="2000" i="1" dirty="0">
+              <a:t>s</a:t>
+            </a:r>
+            <a:r>
+              <a:rPr lang="en-US" sz="2000" i="1" baseline="-40000" dirty="0">
                 <a:solidFill>
                   <a:srgbClr val="14213D"/>
                 </a:solidFill>
@@ -3559,13 +3344,10 @@
                 <a:ea typeface="Cambria Math" pitchFamily="34" charset="-122"/>
                 <a:cs typeface="Cambria Math" pitchFamily="34" charset="-120"/>
               </a:rPr>
-              <a:t>s</a:t>
-            </a:r>
-            <a:pPr indent="0" marL="0">
-              <a:buNone/>
-            </a:pPr>
-            <a:r>
-              <a:rPr lang="en-US" sz="2000" i="1" baseline="-40000" dirty="0">
+              <a:t>ij</a:t>
+            </a:r>
+            <a:r>
+              <a:rPr lang="en-US" sz="2000" dirty="0">
                 <a:solidFill>
                   <a:srgbClr val="14213D"/>
                 </a:solidFill>
@@ -3573,35 +3355,7 @@
                 <a:ea typeface="Cambria Math" pitchFamily="34" charset="-122"/>
                 <a:cs typeface="Cambria Math" pitchFamily="34" charset="-120"/>
               </a:rPr>
-              <a:t>ij</a:t>
-            </a:r>
-            <a:pPr indent="0" marL="0">
-              <a:buNone/>
-            </a:pPr>
-            <a:r>
-              <a:rPr lang="en-US" sz="2000" dirty="0">
-                <a:solidFill>
-                  <a:srgbClr val="14213D"/>
-                </a:solidFill>
-                <a:latin typeface="Cambria Math" pitchFamily="34" charset="0"/>
-                <a:ea typeface="Cambria Math" pitchFamily="34" charset="-122"/>
-                <a:cs typeface="Cambria Math" pitchFamily="34" charset="-120"/>
-              </a:rPr>
-              <a:t> </a:t>
-            </a:r>
-            <a:pPr indent="0" marL="0">
-              <a:buNone/>
-            </a:pPr>
-            <a:r>
-              <a:rPr lang="en-US" sz="2000" dirty="0">
-                <a:solidFill>
-                  <a:srgbClr val="14213D"/>
-                </a:solidFill>
-                <a:latin typeface="Cambria Math" pitchFamily="34" charset="0"/>
-                <a:ea typeface="Cambria Math" pitchFamily="34" charset="-122"/>
-                <a:cs typeface="Cambria Math" pitchFamily="34" charset="-120"/>
-              </a:rPr>
-              <a:t>)</a:t>
+              <a:t> )</a:t>
             </a:r>
             <a:endParaRPr lang="en-US" sz="2000" dirty="0"/>
           </a:p>
@@ -3628,7 +3382,7 @@
           <a:bodyPr wrap="square" lIns="0" tIns="0" rIns="0" bIns="0" rtlCol="0" anchor="t"/>
           <a:lstStyle/>
           <a:p>
-            <a:pPr indent="0" marL="0">
+            <a:pPr marL="0" indent="0">
               <a:buNone/>
             </a:pPr>
             <a:r>
@@ -3667,7 +3421,7 @@
           <a:bodyPr wrap="square" lIns="0" tIns="0" rIns="0" bIns="0" rtlCol="0" anchor="ctr"/>
           <a:lstStyle/>
           <a:p>
-            <a:pPr algn="ctr" indent="0" marL="0">
+            <a:pPr marL="0" indent="0" algn="ctr">
               <a:buNone/>
             </a:pPr>
             <a:r>
@@ -3711,13 +3465,20 @@
             <a:prstDash val="solid"/>
           </a:ln>
           <a:effectLst>
-            <a:outerShdw sx="100000" sy="100000" kx="0" ky="0" algn="bl" rotWithShape="0" blurRad="76200" dist="25400" dir="5400000">
+            <a:outerShdw blurRad="76200" dist="25400" dir="5400000" algn="bl" rotWithShape="0">
               <a:srgbClr val="000000">
                 <a:alpha val="8000"/>
               </a:srgbClr>
             </a:outerShdw>
           </a:effectLst>
         </p:spPr>
+        <p:txBody>
+          <a:bodyPr/>
+          <a:lstStyle/>
+          <a:p>
+            <a:endParaRPr lang="en-US"/>
+          </a:p>
+        </p:txBody>
       </p:sp>
       <p:sp>
         <p:nvSpPr>
@@ -3743,17 +3504,24 @@
             <a:prstDash val="solid"/>
           </a:ln>
         </p:spPr>
+        <p:txBody>
+          <a:bodyPr/>
+          <a:lstStyle/>
+          <a:p>
+            <a:endParaRPr lang="en-US"/>
+          </a:p>
+        </p:txBody>
       </p:sp>
       <p:pic>
         <p:nvPicPr>
-          <p:cNvPr id="13" name="Image 1" descr="preencoded.png">    </p:cNvPr>
+          <p:cNvPr id="13" name="Image 1" descr="preencoded.png"/>
           <p:cNvPicPr>
             <a:picLocks noChangeAspect="1"/>
           </p:cNvPicPr>
           <p:nvPr/>
         </p:nvPicPr>
         <p:blipFill>
-          <a:blip r:embed="rId2"/>
+          <a:blip r:embed="rId4"/>
           <a:stretch>
             <a:fillRect/>
           </a:stretch>
@@ -3789,11 +3557,11 @@
           <a:bodyPr wrap="square" lIns="0" tIns="0" rIns="0" bIns="0" rtlCol="0" anchor="ctr"/>
           <a:lstStyle/>
           <a:p>
-            <a:pPr indent="0" marL="0">
-              <a:buNone/>
-            </a:pPr>
-            <a:r>
-              <a:rPr lang="en-US" sz="1200" b="1" spc="150" kern="0" dirty="0">
+            <a:pPr marL="0" indent="0">
+              <a:buNone/>
+            </a:pPr>
+            <a:r>
+              <a:rPr lang="en-US" sz="1200" b="1" kern="0" spc="150" dirty="0">
                 <a:solidFill>
                   <a:srgbClr val="B4540A"/>
                 </a:solidFill>
@@ -3828,7 +3596,7 @@
           <a:bodyPr wrap="square" lIns="0" tIns="0" rIns="0" bIns="0" rtlCol="0" anchor="ctr"/>
           <a:lstStyle/>
           <a:p>
-            <a:pPr indent="0" marL="0">
+            <a:pPr marL="0" indent="0">
               <a:buNone/>
             </a:pPr>
             <a:r>
@@ -3842,9 +3610,6 @@
               </a:rPr>
               <a:t>p(</a:t>
             </a:r>
-            <a:pPr indent="0" marL="0">
-              <a:buNone/>
-            </a:pPr>
             <a:r>
               <a:rPr lang="en-US" sz="2000" i="1" dirty="0">
                 <a:solidFill>
@@ -3856,9 +3621,6 @@
               </a:rPr>
               <a:t>d</a:t>
             </a:r>
-            <a:pPr indent="0" marL="0">
-              <a:buNone/>
-            </a:pPr>
             <a:r>
               <a:rPr lang="en-US" sz="2000" i="1" baseline="-40000" dirty="0">
                 <a:solidFill>
@@ -3870,9 +3632,6 @@
               </a:rPr>
               <a:t>ij</a:t>
             </a:r>
-            <a:pPr indent="0" marL="0">
-              <a:buNone/>
-            </a:pPr>
             <a:r>
               <a:rPr lang="en-US" sz="2000" dirty="0">
                 <a:solidFill>
@@ -3882,13 +3641,10 @@
                 <a:ea typeface="Cambria Math" pitchFamily="34" charset="-122"/>
                 <a:cs typeface="Cambria Math" pitchFamily="34" charset="-120"/>
               </a:rPr>
-              <a:t> </a:t>
-            </a:r>
-            <a:pPr indent="0" marL="0">
-              <a:buNone/>
-            </a:pPr>
-            <a:r>
-              <a:rPr lang="en-US" sz="2000" dirty="0">
+              <a:t>  | </a:t>
+            </a:r>
+            <a:r>
+              <a:rPr lang="en-US" sz="2000" i="1" dirty="0">
                 <a:solidFill>
                   <a:srgbClr val="14213D"/>
                 </a:solidFill>
@@ -3896,13 +3652,10 @@
                 <a:ea typeface="Cambria Math" pitchFamily="34" charset="-122"/>
                 <a:cs typeface="Cambria Math" pitchFamily="34" charset="-120"/>
               </a:rPr>
-              <a:t> | </a:t>
-            </a:r>
-            <a:pPr indent="0" marL="0">
-              <a:buNone/>
-            </a:pPr>
-            <a:r>
-              <a:rPr lang="en-US" sz="2000" i="1" dirty="0">
+              <a:t>z</a:t>
+            </a:r>
+            <a:r>
+              <a:rPr lang="en-US" sz="2000" i="1" baseline="-40000" dirty="0">
                 <a:solidFill>
                   <a:srgbClr val="14213D"/>
                 </a:solidFill>
@@ -3910,13 +3663,10 @@
                 <a:ea typeface="Cambria Math" pitchFamily="34" charset="-122"/>
                 <a:cs typeface="Cambria Math" pitchFamily="34" charset="-120"/>
               </a:rPr>
-              <a:t>z</a:t>
-            </a:r>
-            <a:pPr indent="0" marL="0">
-              <a:buNone/>
-            </a:pPr>
-            <a:r>
-              <a:rPr lang="en-US" sz="2000" i="1" baseline="-40000" dirty="0">
+              <a:t>ij</a:t>
+            </a:r>
+            <a:r>
+              <a:rPr lang="en-US" sz="2000" dirty="0">
                 <a:solidFill>
                   <a:srgbClr val="14213D"/>
                 </a:solidFill>
@@ -3924,35 +3674,7 @@
                 <a:ea typeface="Cambria Math" pitchFamily="34" charset="-122"/>
                 <a:cs typeface="Cambria Math" pitchFamily="34" charset="-120"/>
               </a:rPr>
-              <a:t>ij</a:t>
-            </a:r>
-            <a:pPr indent="0" marL="0">
-              <a:buNone/>
-            </a:pPr>
-            <a:r>
-              <a:rPr lang="en-US" sz="2000" dirty="0">
-                <a:solidFill>
-                  <a:srgbClr val="14213D"/>
-                </a:solidFill>
-                <a:latin typeface="Cambria Math" pitchFamily="34" charset="0"/>
-                <a:ea typeface="Cambria Math" pitchFamily="34" charset="-122"/>
-                <a:cs typeface="Cambria Math" pitchFamily="34" charset="-120"/>
-              </a:rPr>
-              <a:t> </a:t>
-            </a:r>
-            <a:pPr indent="0" marL="0">
-              <a:buNone/>
-            </a:pPr>
-            <a:r>
-              <a:rPr lang="en-US" sz="2000" dirty="0">
-                <a:solidFill>
-                  <a:srgbClr val="14213D"/>
-                </a:solidFill>
-                <a:latin typeface="Cambria Math" pitchFamily="34" charset="0"/>
-                <a:ea typeface="Cambria Math" pitchFamily="34" charset="-122"/>
-                <a:cs typeface="Cambria Math" pitchFamily="34" charset="-120"/>
-              </a:rPr>
-              <a:t>)</a:t>
+              <a:t> )</a:t>
             </a:r>
             <a:endParaRPr lang="en-US" sz="2000" dirty="0"/>
           </a:p>
@@ -3979,7 +3701,7 @@
           <a:bodyPr wrap="square" lIns="0" tIns="0" rIns="0" bIns="0" rtlCol="0" anchor="t"/>
           <a:lstStyle/>
           <a:p>
-            <a:pPr indent="0" marL="0">
+            <a:pPr marL="0" indent="0">
               <a:buNone/>
             </a:pPr>
             <a:r>
@@ -4018,7 +3740,7 @@
           <a:bodyPr wrap="square" lIns="0" tIns="0" rIns="0" bIns="0" rtlCol="0" anchor="ctr"/>
           <a:lstStyle/>
           <a:p>
-            <a:pPr algn="ctr" indent="0" marL="0">
+            <a:pPr marL="0" indent="0" algn="ctr">
               <a:buNone/>
             </a:pPr>
             <a:r>
@@ -4062,13 +3784,20 @@
             <a:prstDash val="solid"/>
           </a:ln>
           <a:effectLst>
-            <a:outerShdw sx="100000" sy="100000" kx="0" ky="0" algn="bl" rotWithShape="0" blurRad="76200" dist="25400" dir="5400000">
+            <a:outerShdw blurRad="76200" dist="25400" dir="5400000" algn="bl" rotWithShape="0">
               <a:srgbClr val="000000">
                 <a:alpha val="8000"/>
               </a:srgbClr>
             </a:outerShdw>
           </a:effectLst>
         </p:spPr>
+        <p:txBody>
+          <a:bodyPr/>
+          <a:lstStyle/>
+          <a:p>
+            <a:endParaRPr lang="en-US"/>
+          </a:p>
+        </p:txBody>
       </p:sp>
       <p:sp>
         <p:nvSpPr>
@@ -4094,17 +3823,24 @@
             <a:prstDash val="solid"/>
           </a:ln>
         </p:spPr>
+        <p:txBody>
+          <a:bodyPr/>
+          <a:lstStyle/>
+          <a:p>
+            <a:endParaRPr lang="en-US"/>
+          </a:p>
+        </p:txBody>
       </p:sp>
       <p:pic>
         <p:nvPicPr>
-          <p:cNvPr id="20" name="Image 2" descr="preencoded.png">    </p:cNvPr>
+          <p:cNvPr id="20" name="Image 2" descr="preencoded.png"/>
           <p:cNvPicPr>
             <a:picLocks noChangeAspect="1"/>
           </p:cNvPicPr>
           <p:nvPr/>
         </p:nvPicPr>
         <p:blipFill>
-          <a:blip r:embed="rId3"/>
+          <a:blip r:embed="rId5"/>
           <a:stretch>
             <a:fillRect/>
           </a:stretch>
@@ -4140,11 +3876,11 @@
           <a:bodyPr wrap="square" lIns="0" tIns="0" rIns="0" bIns="0" rtlCol="0" anchor="ctr"/>
           <a:lstStyle/>
           <a:p>
-            <a:pPr indent="0" marL="0">
-              <a:buNone/>
-            </a:pPr>
-            <a:r>
-              <a:rPr lang="en-US" sz="1200" b="1" spc="150" kern="0" dirty="0">
+            <a:pPr marL="0" indent="0">
+              <a:buNone/>
+            </a:pPr>
+            <a:r>
+              <a:rPr lang="en-US" sz="1200" b="1" kern="0" spc="150" dirty="0">
                 <a:solidFill>
                   <a:srgbClr val="F2A65A"/>
                 </a:solidFill>
@@ -4179,7 +3915,7 @@
           <a:bodyPr wrap="square" lIns="0" tIns="0" rIns="0" bIns="0" rtlCol="0" anchor="ctr"/>
           <a:lstStyle/>
           <a:p>
-            <a:pPr indent="0" marL="0">
+            <a:pPr marL="0" indent="0">
               <a:buNone/>
             </a:pPr>
             <a:r>
@@ -4193,9 +3929,6 @@
               </a:rPr>
               <a:t>p(</a:t>
             </a:r>
-            <a:pPr indent="0" marL="0">
-              <a:buNone/>
-            </a:pPr>
             <a:r>
               <a:rPr lang="en-US" sz="2000" i="1" dirty="0">
                 <a:solidFill>
@@ -4207,9 +3940,6 @@
               </a:rPr>
               <a:t>z</a:t>
             </a:r>
-            <a:pPr indent="0" marL="0">
-              <a:buNone/>
-            </a:pPr>
             <a:r>
               <a:rPr lang="en-US" sz="2000" i="1" baseline="-40000" dirty="0">
                 <a:solidFill>
@@ -4221,9 +3951,6 @@
               </a:rPr>
               <a:t>ij</a:t>
             </a:r>
-            <a:pPr indent="0" marL="0">
-              <a:buNone/>
-            </a:pPr>
             <a:r>
               <a:rPr lang="en-US" sz="2000" dirty="0">
                 <a:solidFill>
@@ -4233,13 +3960,10 @@
                 <a:ea typeface="Cambria Math" pitchFamily="34" charset="-122"/>
                 <a:cs typeface="Cambria Math" pitchFamily="34" charset="-120"/>
               </a:rPr>
-              <a:t> </a:t>
-            </a:r>
-            <a:pPr indent="0" marL="0">
-              <a:buNone/>
-            </a:pPr>
-            <a:r>
-              <a:rPr lang="en-US" sz="2000" dirty="0">
+              <a:t>  = 1 | </a:t>
+            </a:r>
+            <a:r>
+              <a:rPr lang="en-US" sz="2000" i="1" dirty="0">
                 <a:solidFill>
                   <a:srgbClr val="FFFFFF"/>
                 </a:solidFill>
@@ -4247,13 +3971,10 @@
                 <a:ea typeface="Cambria Math" pitchFamily="34" charset="-122"/>
                 <a:cs typeface="Cambria Math" pitchFamily="34" charset="-120"/>
               </a:rPr>
-              <a:t> = 1 | </a:t>
-            </a:r>
-            <a:pPr indent="0" marL="0">
-              <a:buNone/>
-            </a:pPr>
-            <a:r>
-              <a:rPr lang="en-US" sz="2000" i="1" dirty="0">
+              <a:t>s</a:t>
+            </a:r>
+            <a:r>
+              <a:rPr lang="en-US" sz="2000" i="1" baseline="-40000" dirty="0">
                 <a:solidFill>
                   <a:srgbClr val="FFFFFF"/>
                 </a:solidFill>
@@ -4261,13 +3982,10 @@
                 <a:ea typeface="Cambria Math" pitchFamily="34" charset="-122"/>
                 <a:cs typeface="Cambria Math" pitchFamily="34" charset="-120"/>
               </a:rPr>
-              <a:t>s</a:t>
-            </a:r>
-            <a:pPr indent="0" marL="0">
-              <a:buNone/>
-            </a:pPr>
-            <a:r>
-              <a:rPr lang="en-US" sz="2000" i="1" baseline="-40000" dirty="0">
+              <a:t>ij</a:t>
+            </a:r>
+            <a:r>
+              <a:rPr lang="en-US" sz="2000" dirty="0">
                 <a:solidFill>
                   <a:srgbClr val="FFFFFF"/>
                 </a:solidFill>
@@ -4275,13 +3993,10 @@
                 <a:ea typeface="Cambria Math" pitchFamily="34" charset="-122"/>
                 <a:cs typeface="Cambria Math" pitchFamily="34" charset="-120"/>
               </a:rPr>
-              <a:t>ij</a:t>
-            </a:r>
-            <a:pPr indent="0" marL="0">
-              <a:buNone/>
-            </a:pPr>
-            <a:r>
-              <a:rPr lang="en-US" sz="2000" dirty="0">
+              <a:t> , </a:t>
+            </a:r>
+            <a:r>
+              <a:rPr lang="en-US" sz="2000" i="1" dirty="0">
                 <a:solidFill>
                   <a:srgbClr val="FFFFFF"/>
                 </a:solidFill>
@@ -4289,13 +4004,10 @@
                 <a:ea typeface="Cambria Math" pitchFamily="34" charset="-122"/>
                 <a:cs typeface="Cambria Math" pitchFamily="34" charset="-120"/>
               </a:rPr>
-              <a:t> </a:t>
-            </a:r>
-            <a:pPr indent="0" marL="0">
-              <a:buNone/>
-            </a:pPr>
-            <a:r>
-              <a:rPr lang="en-US" sz="2000" dirty="0">
+              <a:t>d</a:t>
+            </a:r>
+            <a:r>
+              <a:rPr lang="en-US" sz="2000" i="1" baseline="-40000" dirty="0">
                 <a:solidFill>
                   <a:srgbClr val="FFFFFF"/>
                 </a:solidFill>
@@ -4303,13 +4015,10 @@
                 <a:ea typeface="Cambria Math" pitchFamily="34" charset="-122"/>
                 <a:cs typeface="Cambria Math" pitchFamily="34" charset="-120"/>
               </a:rPr>
-              <a:t>, </a:t>
-            </a:r>
-            <a:pPr indent="0" marL="0">
-              <a:buNone/>
-            </a:pPr>
-            <a:r>
-              <a:rPr lang="en-US" sz="2000" i="1" dirty="0">
+              <a:t>ij</a:t>
+            </a:r>
+            <a:r>
+              <a:rPr lang="en-US" sz="2000" dirty="0">
                 <a:solidFill>
                   <a:srgbClr val="FFFFFF"/>
                 </a:solidFill>
@@ -4317,49 +4026,7 @@
                 <a:ea typeface="Cambria Math" pitchFamily="34" charset="-122"/>
                 <a:cs typeface="Cambria Math" pitchFamily="34" charset="-120"/>
               </a:rPr>
-              <a:t>d</a:t>
-            </a:r>
-            <a:pPr indent="0" marL="0">
-              <a:buNone/>
-            </a:pPr>
-            <a:r>
-              <a:rPr lang="en-US" sz="2000" i="1" baseline="-40000" dirty="0">
-                <a:solidFill>
-                  <a:srgbClr val="FFFFFF"/>
-                </a:solidFill>
-                <a:latin typeface="Cambria Math" pitchFamily="34" charset="0"/>
-                <a:ea typeface="Cambria Math" pitchFamily="34" charset="-122"/>
-                <a:cs typeface="Cambria Math" pitchFamily="34" charset="-120"/>
-              </a:rPr>
-              <a:t>ij</a:t>
-            </a:r>
-            <a:pPr indent="0" marL="0">
-              <a:buNone/>
-            </a:pPr>
-            <a:r>
-              <a:rPr lang="en-US" sz="2000" dirty="0">
-                <a:solidFill>
-                  <a:srgbClr val="FFFFFF"/>
-                </a:solidFill>
-                <a:latin typeface="Cambria Math" pitchFamily="34" charset="0"/>
-                <a:ea typeface="Cambria Math" pitchFamily="34" charset="-122"/>
-                <a:cs typeface="Cambria Math" pitchFamily="34" charset="-120"/>
-              </a:rPr>
-              <a:t> </a:t>
-            </a:r>
-            <a:pPr indent="0" marL="0">
-              <a:buNone/>
-            </a:pPr>
-            <a:r>
-              <a:rPr lang="en-US" sz="2000" dirty="0">
-                <a:solidFill>
-                  <a:srgbClr val="FFFFFF"/>
-                </a:solidFill>
-                <a:latin typeface="Cambria Math" pitchFamily="34" charset="0"/>
-                <a:ea typeface="Cambria Math" pitchFamily="34" charset="-122"/>
-                <a:cs typeface="Cambria Math" pitchFamily="34" charset="-120"/>
-              </a:rPr>
-              <a:t>)</a:t>
+              <a:t> )</a:t>
             </a:r>
             <a:endParaRPr lang="en-US" sz="2000" dirty="0"/>
           </a:p>
@@ -4386,7 +4053,7 @@
           <a:bodyPr wrap="square" lIns="0" tIns="0" rIns="0" bIns="0" rtlCol="0" anchor="t"/>
           <a:lstStyle/>
           <a:p>
-            <a:pPr indent="0" marL="0">
+            <a:pPr marL="0" indent="0">
               <a:buNone/>
             </a:pPr>
             <a:r>
@@ -4430,6 +4097,13 @@
             <a:prstDash val="solid"/>
           </a:ln>
         </p:spPr>
+        <p:txBody>
+          <a:bodyPr/>
+          <a:lstStyle/>
+          <a:p>
+            <a:endParaRPr lang="en-US"/>
+          </a:p>
+        </p:txBody>
       </p:sp>
       <p:sp>
         <p:nvSpPr>
@@ -4452,11 +4126,11 @@
           <a:bodyPr wrap="square" lIns="0" tIns="0" rIns="0" bIns="0" rtlCol="0" anchor="ctr"/>
           <a:lstStyle/>
           <a:p>
-            <a:pPr indent="0" marL="0">
-              <a:buNone/>
-            </a:pPr>
-            <a:r>
-              <a:rPr lang="en-US" sz="1300" b="1" spc="300" kern="0" dirty="0">
+            <a:pPr marL="0" indent="0">
+              <a:buNone/>
+            </a:pPr>
+            <a:r>
+              <a:rPr lang="en-US" sz="1300" b="1" kern="0" spc="300" dirty="0">
                 <a:solidFill>
                   <a:srgbClr val="B4540A"/>
                 </a:solidFill>
@@ -4496,6 +4170,13 @@
             <a:prstDash val="solid"/>
           </a:ln>
         </p:spPr>
+        <p:txBody>
+          <a:bodyPr/>
+          <a:lstStyle/>
+          <a:p>
+            <a:endParaRPr lang="en-US"/>
+          </a:p>
+        </p:txBody>
       </p:sp>
       <p:sp>
         <p:nvSpPr>
@@ -4518,7 +4199,7 @@
           <a:bodyPr wrap="square" lIns="0" tIns="0" rIns="0" bIns="0" rtlCol="0" anchor="ctr"/>
           <a:lstStyle/>
           <a:p>
-            <a:pPr indent="0" marL="0">
+            <a:pPr marL="0" indent="0">
               <a:buNone/>
             </a:pPr>
             <a:r>
@@ -4560,6 +4241,13 @@
             <a:prstDash val="solid"/>
           </a:ln>
         </p:spPr>
+        <p:txBody>
+          <a:bodyPr/>
+          <a:lstStyle/>
+          <a:p>
+            <a:endParaRPr lang="en-US"/>
+          </a:p>
+        </p:txBody>
       </p:sp>
       <p:sp>
         <p:nvSpPr>
@@ -4587,6 +4275,13 @@
             <a:prstDash val="solid"/>
           </a:ln>
         </p:spPr>
+        <p:txBody>
+          <a:bodyPr/>
+          <a:lstStyle/>
+          <a:p>
+            <a:endParaRPr lang="en-US"/>
+          </a:p>
+        </p:txBody>
       </p:sp>
       <p:sp>
         <p:nvSpPr>
@@ -4609,7 +4304,7 @@
           <a:bodyPr wrap="square" lIns="0" tIns="0" rIns="0" bIns="0" rtlCol="0" anchor="ctr"/>
           <a:lstStyle/>
           <a:p>
-            <a:pPr indent="0" marL="0">
+            <a:pPr marL="0" indent="0">
               <a:buNone/>
             </a:pPr>
             <a:r>
@@ -4623,9 +4318,6 @@
               </a:rPr>
               <a:t>Give GNN weights </a:t>
             </a:r>
-            <a:pPr indent="0" marL="0">
-              <a:buNone/>
-            </a:pPr>
             <a:r>
               <a:rPr lang="en-US" sz="1400" i="1" dirty="0">
                 <a:solidFill>
@@ -4637,9 +4329,6 @@
               </a:rPr>
               <a:t>W</a:t>
             </a:r>
-            <a:pPr indent="0" marL="0">
-              <a:buNone/>
-            </a:pPr>
             <a:r>
               <a:rPr lang="en-US" sz="1400" dirty="0">
                 <a:solidFill>
@@ -4679,6 +4368,13 @@
             <a:prstDash val="solid"/>
           </a:ln>
         </p:spPr>
+        <p:txBody>
+          <a:bodyPr/>
+          <a:lstStyle/>
+          <a:p>
+            <a:endParaRPr lang="en-US"/>
+          </a:p>
+        </p:txBody>
       </p:sp>
       <p:sp>
         <p:nvSpPr>
@@ -4706,6 +4402,13 @@
             <a:prstDash val="solid"/>
           </a:ln>
         </p:spPr>
+        <p:txBody>
+          <a:bodyPr/>
+          <a:lstStyle/>
+          <a:p>
+            <a:endParaRPr lang="en-US"/>
+          </a:p>
+        </p:txBody>
       </p:sp>
       <p:sp>
         <p:nvSpPr>
@@ -4728,7 +4431,7 @@
           <a:bodyPr wrap="square" lIns="0" tIns="0" rIns="0" bIns="0" rtlCol="0" anchor="ctr"/>
           <a:lstStyle/>
           <a:p>
-            <a:pPr indent="0" marL="0">
+            <a:pPr marL="0" indent="0">
               <a:buNone/>
             </a:pPr>
             <a:r>
@@ -4767,7 +4470,7 @@
           <a:bodyPr wrap="square" lIns="0" tIns="0" rIns="0" bIns="0" rtlCol="0" anchor="ctr"/>
           <a:lstStyle/>
           <a:p>
-            <a:pPr indent="0" marL="0">
+            <a:pPr marL="0" indent="0">
               <a:buNone/>
             </a:pPr>
             <a:r>
@@ -4781,9 +4484,6 @@
               </a:rPr>
               <a:t>Hidden: </a:t>
             </a:r>
-            <a:pPr indent="0" marL="0">
-              <a:buNone/>
-            </a:pPr>
             <a:r>
               <a:rPr lang="en-US" sz="1200" i="1" dirty="0">
                 <a:solidFill>
@@ -4795,9 +4495,6 @@
               </a:rPr>
               <a:t>z</a:t>
             </a:r>
-            <a:pPr indent="0" marL="0">
-              <a:buNone/>
-            </a:pPr>
             <a:r>
               <a:rPr lang="en-US" sz="1200" i="1" baseline="-40000" dirty="0">
                 <a:solidFill>
@@ -4809,9 +4506,6 @@
               </a:rPr>
               <a:t>ij</a:t>
             </a:r>
-            <a:pPr indent="0" marL="0">
-              <a:buNone/>
-            </a:pPr>
             <a:r>
               <a:rPr lang="en-US" sz="1200" dirty="0">
                 <a:solidFill>
@@ -4821,11 +4515,19 @@
                 <a:ea typeface="Calibri" pitchFamily="34" charset="-122"/>
                 <a:cs typeface="Calibri" pitchFamily="34" charset="-120"/>
               </a:rPr>
-              <a:t> </a:t>
-            </a:r>
-            <a:pPr indent="0" marL="0">
-              <a:buNone/>
-            </a:pPr>
+              <a:t> , </a:t>
+            </a:r>
+            <a:r>
+              <a:rPr lang="en-US" sz="1200" i="1" dirty="0">
+                <a:solidFill>
+                  <a:srgbClr val="4A5568"/>
+                </a:solidFill>
+                <a:latin typeface="Calibri" pitchFamily="34" charset="0"/>
+                <a:ea typeface="Calibri" pitchFamily="34" charset="-122"/>
+                <a:cs typeface="Calibri" pitchFamily="34" charset="-120"/>
+              </a:rPr>
+              <a:t>W</a:t>
+            </a:r>
             <a:r>
               <a:rPr lang="en-US" sz="1200" dirty="0">
                 <a:solidFill>
@@ -4835,11 +4537,8 @@
                 <a:ea typeface="Calibri" pitchFamily="34" charset="-122"/>
                 <a:cs typeface="Calibri" pitchFamily="34" charset="-120"/>
               </a:rPr>
-              <a:t>, </a:t>
-            </a:r>
-            <a:pPr indent="0" marL="0">
-              <a:buNone/>
-            </a:pPr>
+              <a:t>   ·   Observed: node texts, edges (incl. injected), training labels, LLM scores </a:t>
+            </a:r>
             <a:r>
               <a:rPr lang="en-US" sz="1200" i="1" dirty="0">
                 <a:solidFill>
@@ -4849,13 +4548,10 @@
                 <a:ea typeface="Calibri" pitchFamily="34" charset="-122"/>
                 <a:cs typeface="Calibri" pitchFamily="34" charset="-120"/>
               </a:rPr>
-              <a:t>W</a:t>
-            </a:r>
-            <a:pPr indent="0" marL="0">
-              <a:buNone/>
-            </a:pPr>
-            <a:r>
-              <a:rPr lang="en-US" sz="1200" dirty="0">
+              <a:t>s</a:t>
+            </a:r>
+            <a:r>
+              <a:rPr lang="en-US" sz="1200" i="1" baseline="-40000" dirty="0">
                 <a:solidFill>
                   <a:srgbClr val="4A5568"/>
                 </a:solidFill>
@@ -4863,39 +4559,8 @@
                 <a:ea typeface="Calibri" pitchFamily="34" charset="-122"/>
                 <a:cs typeface="Calibri" pitchFamily="34" charset="-120"/>
               </a:rPr>
-              <a:t>   ·   Observed: node texts, edges (incl. injected), training labels, LLM scores </a:t>
-            </a:r>
-            <a:pPr indent="0" marL="0">
-              <a:buNone/>
-            </a:pPr>
-            <a:r>
-              <a:rPr lang="en-US" sz="1200" i="1" dirty="0">
-                <a:solidFill>
-                  <a:srgbClr val="4A5568"/>
-                </a:solidFill>
-                <a:latin typeface="Calibri" pitchFamily="34" charset="0"/>
-                <a:ea typeface="Calibri" pitchFamily="34" charset="-122"/>
-                <a:cs typeface="Calibri" pitchFamily="34" charset="-120"/>
-              </a:rPr>
-              <a:t>s</a:t>
-            </a:r>
-            <a:pPr indent="0" marL="0">
-              <a:buNone/>
-            </a:pPr>
-            <a:r>
-              <a:rPr lang="en-US" sz="1200" i="1" baseline="-40000" dirty="0">
-                <a:solidFill>
-                  <a:srgbClr val="4A5568"/>
-                </a:solidFill>
-                <a:latin typeface="Calibri" pitchFamily="34" charset="0"/>
-                <a:ea typeface="Calibri" pitchFamily="34" charset="-122"/>
-                <a:cs typeface="Calibri" pitchFamily="34" charset="-120"/>
-              </a:rPr>
               <a:t>ij</a:t>
             </a:r>
-            <a:pPr indent="0" marL="0">
-              <a:buNone/>
-            </a:pPr>
             <a:r>
               <a:rPr lang="en-US" sz="1200" dirty="0">
                 <a:solidFill>
@@ -4932,7 +4597,7 @@
           <a:bodyPr wrap="square" lIns="0" tIns="0" rIns="0" bIns="0" rtlCol="0" anchor="ctr"/>
           <a:lstStyle/>
           <a:p>
-            <a:pPr indent="0" marL="0">
+            <a:pPr marL="0" indent="0">
               <a:buNone/>
             </a:pPr>
             <a:r>
@@ -4971,7 +4636,7 @@
           <a:bodyPr wrap="square" lIns="0" tIns="0" rIns="0" bIns="0" rtlCol="0" anchor="ctr"/>
           <a:lstStyle/>
           <a:p>
-            <a:pPr algn="r" indent="0" marL="0">
+            <a:pPr marL="0" indent="0" algn="r">
               <a:buNone/>
             </a:pPr>
             <a:r>
@@ -5005,6 +4670,7 @@
         <a:solidFill>
           <a:srgbClr val="FFFFFF"/>
         </a:solidFill>
+        <a:effectLst/>
       </p:bgPr>
     </p:bg>
     <p:spTree>
@@ -5042,7 +4708,7 @@
           <a:bodyPr wrap="square" lIns="0" tIns="0" rIns="0" bIns="0" rtlCol="0" anchor="ctr"/>
           <a:lstStyle/>
           <a:p>
-            <a:pPr indent="0" marL="0">
+            <a:pPr marL="0" indent="0">
               <a:buNone/>
             </a:pPr>
             <a:r>
@@ -5086,6 +4752,13 @@
             <a:prstDash val="solid"/>
           </a:ln>
         </p:spPr>
+        <p:txBody>
+          <a:bodyPr/>
+          <a:lstStyle/>
+          <a:p>
+            <a:endParaRPr lang="en-US"/>
+          </a:p>
+        </p:txBody>
       </p:sp>
       <p:sp>
         <p:nvSpPr>
@@ -5111,17 +4784,24 @@
             <a:prstDash val="solid"/>
           </a:ln>
         </p:spPr>
+        <p:txBody>
+          <a:bodyPr/>
+          <a:lstStyle/>
+          <a:p>
+            <a:endParaRPr lang="en-US"/>
+          </a:p>
+        </p:txBody>
       </p:sp>
       <p:pic>
         <p:nvPicPr>
-          <p:cNvPr id="5" name="Image 0" descr="preencoded.png">    </p:cNvPr>
+          <p:cNvPr id="5" name="Image 0" descr="preencoded.png"/>
           <p:cNvPicPr>
             <a:picLocks noChangeAspect="1"/>
           </p:cNvPicPr>
           <p:nvPr/>
         </p:nvPicPr>
         <p:blipFill>
-          <a:blip r:embed="rId1"/>
+          <a:blip r:embed="rId3"/>
           <a:stretch>
             <a:fillRect/>
           </a:stretch>
@@ -5157,7 +4837,7 @@
           <a:bodyPr wrap="square" lIns="0" tIns="0" rIns="0" bIns="0" rtlCol="0" anchor="ctr"/>
           <a:lstStyle/>
           <a:p>
-            <a:pPr indent="0" marL="0">
+            <a:pPr marL="0" indent="0">
               <a:buNone/>
             </a:pPr>
             <a:r>
@@ -5196,7 +4876,7 @@
           <a:bodyPr wrap="square" lIns="0" tIns="0" rIns="0" bIns="0" rtlCol="0" anchor="t"/>
           <a:lstStyle/>
           <a:p>
-            <a:pPr indent="0" marL="0">
+            <a:pPr marL="0" indent="0">
               <a:buNone/>
             </a:pPr>
             <a:r>
@@ -5235,7 +4915,7 @@
           <a:bodyPr wrap="square" lIns="0" tIns="0" rIns="0" bIns="0" rtlCol="0" anchor="t"/>
           <a:lstStyle/>
           <a:p>
-            <a:pPr indent="0" marL="0">
+            <a:pPr marL="0" indent="0">
               <a:buNone/>
             </a:pPr>
             <a:r>
@@ -5279,6 +4959,13 @@
             <a:prstDash val="solid"/>
           </a:ln>
         </p:spPr>
+        <p:txBody>
+          <a:bodyPr/>
+          <a:lstStyle/>
+          <a:p>
+            <a:endParaRPr lang="en-US"/>
+          </a:p>
+        </p:txBody>
       </p:sp>
       <p:sp>
         <p:nvSpPr>
@@ -5301,7 +4988,7 @@
           <a:bodyPr wrap="square" lIns="0" tIns="0" rIns="0" bIns="0" rtlCol="0" anchor="ctr"/>
           <a:lstStyle/>
           <a:p>
-            <a:pPr indent="0" marL="0">
+            <a:pPr marL="0" indent="0">
               <a:buNone/>
             </a:pPr>
             <a:r>
@@ -5345,6 +5032,13 @@
             <a:prstDash val="solid"/>
           </a:ln>
         </p:spPr>
+        <p:txBody>
+          <a:bodyPr/>
+          <a:lstStyle/>
+          <a:p>
+            <a:endParaRPr lang="en-US"/>
+          </a:p>
+        </p:txBody>
       </p:sp>
       <p:sp>
         <p:nvSpPr>
@@ -5370,17 +5064,24 @@
             <a:prstDash val="solid"/>
           </a:ln>
         </p:spPr>
+        <p:txBody>
+          <a:bodyPr/>
+          <a:lstStyle/>
+          <a:p>
+            <a:endParaRPr lang="en-US"/>
+          </a:p>
+        </p:txBody>
       </p:sp>
       <p:pic>
         <p:nvPicPr>
-          <p:cNvPr id="13" name="Image 1" descr="preencoded.png">    </p:cNvPr>
+          <p:cNvPr id="13" name="Image 1" descr="preencoded.png"/>
           <p:cNvPicPr>
             <a:picLocks noChangeAspect="1"/>
           </p:cNvPicPr>
           <p:nvPr/>
         </p:nvPicPr>
         <p:blipFill>
-          <a:blip r:embed="rId2"/>
+          <a:blip r:embed="rId4"/>
           <a:stretch>
             <a:fillRect/>
           </a:stretch>
@@ -5416,7 +5117,7 @@
           <a:bodyPr wrap="square" lIns="0" tIns="0" rIns="0" bIns="0" rtlCol="0" anchor="ctr"/>
           <a:lstStyle/>
           <a:p>
-            <a:pPr indent="0" marL="0">
+            <a:pPr marL="0" indent="0">
               <a:buNone/>
             </a:pPr>
             <a:r>
@@ -5455,7 +5156,7 @@
           <a:bodyPr wrap="square" lIns="0" tIns="0" rIns="0" bIns="0" rtlCol="0" anchor="t"/>
           <a:lstStyle/>
           <a:p>
-            <a:pPr indent="0" marL="0">
+            <a:pPr marL="0" indent="0">
               <a:buNone/>
             </a:pPr>
             <a:r>
@@ -5494,7 +5195,7 @@
           <a:bodyPr wrap="square" lIns="0" tIns="0" rIns="0" bIns="0" rtlCol="0" anchor="t"/>
           <a:lstStyle/>
           <a:p>
-            <a:pPr indent="0" marL="0">
+            <a:pPr marL="0" indent="0">
               <a:buNone/>
             </a:pPr>
             <a:r>
@@ -5538,6 +5239,13 @@
             <a:prstDash val="solid"/>
           </a:ln>
         </p:spPr>
+        <p:txBody>
+          <a:bodyPr/>
+          <a:lstStyle/>
+          <a:p>
+            <a:endParaRPr lang="en-US"/>
+          </a:p>
+        </p:txBody>
       </p:sp>
       <p:sp>
         <p:nvSpPr>
@@ -5560,7 +5268,7 @@
           <a:bodyPr wrap="square" lIns="0" tIns="0" rIns="0" bIns="0" rtlCol="0" anchor="ctr"/>
           <a:lstStyle/>
           <a:p>
-            <a:pPr indent="0" marL="0">
+            <a:pPr marL="0" indent="0">
               <a:buNone/>
             </a:pPr>
             <a:r>
@@ -5604,6 +5312,13 @@
             <a:prstDash val="solid"/>
           </a:ln>
         </p:spPr>
+        <p:txBody>
+          <a:bodyPr/>
+          <a:lstStyle/>
+          <a:p>
+            <a:endParaRPr lang="en-US"/>
+          </a:p>
+        </p:txBody>
       </p:sp>
       <p:sp>
         <p:nvSpPr>
@@ -5629,17 +5344,24 @@
             <a:prstDash val="solid"/>
           </a:ln>
         </p:spPr>
+        <p:txBody>
+          <a:bodyPr/>
+          <a:lstStyle/>
+          <a:p>
+            <a:endParaRPr lang="en-US"/>
+          </a:p>
+        </p:txBody>
       </p:sp>
       <p:pic>
         <p:nvPicPr>
-          <p:cNvPr id="21" name="Image 2" descr="preencoded.png">    </p:cNvPr>
+          <p:cNvPr id="21" name="Image 2" descr="preencoded.png"/>
           <p:cNvPicPr>
             <a:picLocks noChangeAspect="1"/>
           </p:cNvPicPr>
           <p:nvPr/>
         </p:nvPicPr>
         <p:blipFill>
-          <a:blip r:embed="rId3"/>
+          <a:blip r:embed="rId5"/>
           <a:stretch>
             <a:fillRect/>
           </a:stretch>
@@ -5675,7 +5397,7 @@
           <a:bodyPr wrap="square" lIns="0" tIns="0" rIns="0" bIns="0" rtlCol="0" anchor="ctr"/>
           <a:lstStyle/>
           <a:p>
-            <a:pPr indent="0" marL="0">
+            <a:pPr marL="0" indent="0">
               <a:buNone/>
             </a:pPr>
             <a:r>
@@ -5714,7 +5436,7 @@
           <a:bodyPr wrap="square" lIns="0" tIns="0" rIns="0" bIns="0" rtlCol="0" anchor="t"/>
           <a:lstStyle/>
           <a:p>
-            <a:pPr indent="0" marL="0">
+            <a:pPr marL="0" indent="0">
               <a:buNone/>
             </a:pPr>
             <a:r>
@@ -5753,7 +5475,7 @@
           <a:bodyPr wrap="square" lIns="0" tIns="0" rIns="0" bIns="0" rtlCol="0" anchor="t"/>
           <a:lstStyle/>
           <a:p>
-            <a:pPr indent="0" marL="0">
+            <a:pPr marL="0" indent="0">
               <a:buNone/>
             </a:pPr>
             <a:r>
@@ -5797,6 +5519,13 @@
             <a:prstDash val="solid"/>
           </a:ln>
         </p:spPr>
+        <p:txBody>
+          <a:bodyPr/>
+          <a:lstStyle/>
+          <a:p>
+            <a:endParaRPr lang="en-US"/>
+          </a:p>
+        </p:txBody>
       </p:sp>
       <p:sp>
         <p:nvSpPr>
@@ -5819,7 +5548,7 @@
           <a:bodyPr wrap="square" lIns="0" tIns="0" rIns="0" bIns="0" rtlCol="0" anchor="ctr"/>
           <a:lstStyle/>
           <a:p>
-            <a:pPr indent="0" marL="0">
+            <a:pPr marL="0" indent="0">
               <a:buNone/>
             </a:pPr>
             <a:r>
@@ -5858,7 +5587,7 @@
           <a:bodyPr wrap="square" lIns="0" tIns="0" rIns="0" bIns="0" rtlCol="0" anchor="ctr"/>
           <a:lstStyle/>
           <a:p>
-            <a:pPr indent="0" marL="0">
+            <a:pPr marL="0" indent="0">
               <a:buNone/>
             </a:pPr>
             <a:r>
@@ -5897,7 +5626,7 @@
           <a:bodyPr wrap="square" lIns="0" tIns="0" rIns="0" bIns="0" rtlCol="0" anchor="ctr"/>
           <a:lstStyle/>
           <a:p>
-            <a:pPr algn="r" indent="0" marL="0">
+            <a:pPr marL="0" indent="0" algn="r">
               <a:buNone/>
             </a:pPr>
             <a:r>
@@ -5931,6 +5660,7 @@
         <a:solidFill>
           <a:srgbClr val="B4540A"/>
         </a:solidFill>
+        <a:effectLst/>
       </p:bgPr>
     </p:bg>
     <p:spTree>
@@ -5968,11 +5698,11 @@
           <a:bodyPr wrap="square" lIns="0" tIns="0" rIns="0" bIns="0" rtlCol="0" anchor="ctr"/>
           <a:lstStyle/>
           <a:p>
-            <a:pPr indent="0" marL="0">
-              <a:buNone/>
-            </a:pPr>
-            <a:r>
-              <a:rPr lang="en-US" sz="1400" b="1" spc="400" kern="0" dirty="0">
+            <a:pPr marL="0" indent="0">
+              <a:buNone/>
+            </a:pPr>
+            <a:r>
+              <a:rPr lang="en-US" sz="1400" b="1" kern="0" spc="400" dirty="0">
                 <a:solidFill>
                   <a:srgbClr val="FBF7F0"/>
                 </a:solidFill>
@@ -6007,7 +5737,7 @@
           <a:bodyPr wrap="square" lIns="0" tIns="0" rIns="0" bIns="0" rtlCol="0" anchor="t"/>
           <a:lstStyle/>
           <a:p>
-            <a:pPr indent="0" marL="0">
+            <a:pPr marL="0" indent="0">
               <a:buNone/>
             </a:pPr>
             <a:r>
@@ -6046,7 +5776,7 @@
           <a:bodyPr wrap="square" lIns="0" tIns="0" rIns="0" bIns="0" rtlCol="0" anchor="ctr"/>
           <a:lstStyle/>
           <a:p>
-            <a:pPr indent="0" marL="0">
+            <a:pPr marL="0" indent="0">
               <a:buNone/>
             </a:pPr>
             <a:r>
@@ -6090,6 +5820,13 @@
             <a:prstDash val="solid"/>
           </a:ln>
         </p:spPr>
+        <p:txBody>
+          <a:bodyPr/>
+          <a:lstStyle/>
+          <a:p>
+            <a:endParaRPr lang="en-US"/>
+          </a:p>
+        </p:txBody>
       </p:sp>
       <p:sp>
         <p:nvSpPr>
@@ -6112,7 +5849,7 @@
           <a:bodyPr wrap="square" lIns="0" tIns="0" rIns="0" bIns="0" rtlCol="0" anchor="ctr"/>
           <a:lstStyle/>
           <a:p>
-            <a:pPr indent="0" marL="0">
+            <a:pPr marL="0" indent="0">
               <a:spcAft>
                 <a:spcPts val="400"/>
               </a:spcAft>
@@ -6132,7 +5869,7 @@
             <a:endParaRPr lang="en-US" sz="2200" dirty="0"/>
           </a:p>
           <a:p>
-            <a:pPr indent="0" marL="0">
+            <a:pPr marL="0" indent="0">
               <a:spcAft>
                 <a:spcPts val="400"/>
               </a:spcAft>
@@ -6177,6 +5914,13 @@
             <a:prstDash val="solid"/>
           </a:ln>
         </p:spPr>
+        <p:txBody>
+          <a:bodyPr/>
+          <a:lstStyle/>
+          <a:p>
+            <a:endParaRPr lang="en-US"/>
+          </a:p>
+        </p:txBody>
       </p:sp>
       <p:sp>
         <p:nvSpPr>
@@ -6204,6 +5948,13 @@
             <a:prstDash val="solid"/>
           </a:ln>
         </p:spPr>
+        <p:txBody>
+          <a:bodyPr/>
+          <a:lstStyle/>
+          <a:p>
+            <a:endParaRPr lang="en-US"/>
+          </a:p>
+        </p:txBody>
       </p:sp>
       <p:sp>
         <p:nvSpPr>
@@ -6226,7 +5977,7 @@
           <a:bodyPr wrap="square" lIns="0" tIns="0" rIns="0" bIns="0" rtlCol="0" anchor="ctr"/>
           <a:lstStyle/>
           <a:p>
-            <a:pPr indent="0" marL="0">
+            <a:pPr marL="0" indent="0">
               <a:spcAft>
                 <a:spcPts val="400"/>
               </a:spcAft>
@@ -6246,7 +5997,7 @@
             <a:endParaRPr lang="en-US" sz="2200" dirty="0"/>
           </a:p>
           <a:p>
-            <a:pPr indent="0" marL="0">
+            <a:pPr marL="0" indent="0">
               <a:spcAft>
                 <a:spcPts val="400"/>
               </a:spcAft>
@@ -6291,6 +6042,13 @@
             <a:prstDash val="solid"/>
           </a:ln>
         </p:spPr>
+        <p:txBody>
+          <a:bodyPr/>
+          <a:lstStyle/>
+          <a:p>
+            <a:endParaRPr lang="en-US"/>
+          </a:p>
+        </p:txBody>
       </p:sp>
       <p:sp>
         <p:nvSpPr>
@@ -6318,6 +6076,13 @@
             <a:prstDash val="solid"/>
           </a:ln>
         </p:spPr>
+        <p:txBody>
+          <a:bodyPr/>
+          <a:lstStyle/>
+          <a:p>
+            <a:endParaRPr lang="en-US"/>
+          </a:p>
+        </p:txBody>
       </p:sp>
       <p:sp>
         <p:nvSpPr>
@@ -6340,7 +6105,7 @@
           <a:bodyPr wrap="square" lIns="0" tIns="0" rIns="0" bIns="0" rtlCol="0" anchor="ctr"/>
           <a:lstStyle/>
           <a:p>
-            <a:pPr indent="0" marL="0">
+            <a:pPr marL="0" indent="0">
               <a:spcAft>
                 <a:spcPts val="400"/>
               </a:spcAft>
@@ -6360,7 +6125,7 @@
             <a:endParaRPr lang="en-US" sz="2200" dirty="0"/>
           </a:p>
           <a:p>
-            <a:pPr indent="0" marL="0">
+            <a:pPr marL="0" indent="0">
               <a:spcAft>
                 <a:spcPts val="400"/>
               </a:spcAft>
@@ -6397,6 +6162,7 @@
         <a:solidFill>
           <a:srgbClr val="14213D"/>
         </a:solidFill>
+        <a:effectLst/>
       </p:bgPr>
     </p:bg>
     <p:spTree>
@@ -6434,7 +6200,7 @@
           <a:bodyPr wrap="square" lIns="0" tIns="0" rIns="0" bIns="0" rtlCol="0" anchor="ctr"/>
           <a:lstStyle/>
           <a:p>
-            <a:pPr indent="0" marL="0">
+            <a:pPr marL="0" indent="0">
               <a:buNone/>
             </a:pPr>
             <a:r>
@@ -6602,115 +6368,6 @@
       </p:sp>
       <p:sp>
         <p:nvSpPr>
-          <p:cNvPr id="4" name="Shape 2"/>
-          <p:cNvSpPr/>
-          <p:nvPr/>
-        </p:nvSpPr>
-        <p:spPr>
-          <a:xfrm>
-            <a:off x="7406640" y="1463040"/>
-            <a:ext cx="4233672" cy="2514600"/>
-          </a:xfrm>
-          <a:prstGeom prst="roundRect">
-            <a:avLst>
-              <a:gd name="adj" fmla="val 4364"/>
-            </a:avLst>
-          </a:prstGeom>
-          <a:solidFill>
-            <a:srgbClr val="B4540A"/>
-          </a:solidFill>
-          <a:ln w="12700">
-            <a:solidFill>
-              <a:srgbClr val="B4540A"/>
-            </a:solidFill>
-            <a:prstDash val="solid"/>
-          </a:ln>
-        </p:spPr>
-      </p:sp>
-      <p:sp>
-        <p:nvSpPr>
-          <p:cNvPr id="5" name="Text 3"/>
-          <p:cNvSpPr txBox="1"/>
-          <p:nvPr/>
-        </p:nvSpPr>
-        <p:spPr>
-          <a:xfrm>
-            <a:off x="7726680" y="1737360"/>
-            <a:ext cx="3611880" cy="2103120"/>
-          </a:xfrm>
-          <a:prstGeom prst="rect">
-            <a:avLst/>
-          </a:prstGeom>
-          <a:noFill/>
-          <a:ln/>
-        </p:spPr>
-        <p:txBody>
-          <a:bodyPr wrap="square" lIns="0" tIns="0" rIns="0" bIns="0" rtlCol="0" anchor="t"/>
-          <a:lstStyle/>
-          <a:p>
-            <a:pPr indent="0" marL="0">
-              <a:spcAft>
-                <a:spcPts val="1000"/>
-              </a:spcAft>
-              <a:buNone/>
-            </a:pPr>
-            <a:r>
-              <a:rPr lang="en-US" sz="1300" b="1" spc="300" kern="0" dirty="0">
-                <a:solidFill>
-                  <a:srgbClr val="FBF7F0"/>
-                </a:solidFill>
-                <a:latin typeface="Calibri" pitchFamily="34" charset="0"/>
-                <a:ea typeface="Calibri" pitchFamily="34" charset="-122"/>
-                <a:cs typeface="Calibri" pitchFamily="34" charset="-120"/>
-              </a:rPr>
-              <a:t>THE ASK</a:t>
-            </a:r>
-            <a:endParaRPr lang="en-US" sz="1300" dirty="0"/>
-          </a:p>
-          <a:p>
-            <a:pPr indent="0" marL="0">
-              <a:spcAft>
-                <a:spcPts val="1000"/>
-              </a:spcAft>
-              <a:buNone/>
-            </a:pPr>
-            <a:r>
-              <a:rPr lang="en-US" sz="2800" b="1" dirty="0">
-                <a:solidFill>
-                  <a:srgbClr val="FFFFFF"/>
-                </a:solidFill>
-                <a:latin typeface="Cambria" pitchFamily="34" charset="0"/>
-                <a:ea typeface="Cambria" pitchFamily="34" charset="-122"/>
-                <a:cs typeface="Cambria" pitchFamily="34" charset="-120"/>
-              </a:rPr>
-              <a:t>Looking for 1–2 teammates</a:t>
-            </a:r>
-            <a:endParaRPr lang="en-US" sz="1300" dirty="0"/>
-          </a:p>
-          <a:p>
-            <a:pPr indent="0" marL="0">
-              <a:spcAft>
-                <a:spcPts val="1000"/>
-              </a:spcAft>
-              <a:buNone/>
-            </a:pPr>
-            <a:r>
-              <a:rPr lang="en-US" sz="1600" dirty="0">
-                <a:solidFill>
-                  <a:srgbClr val="FBF7F0"/>
-                </a:solidFill>
-                <a:latin typeface="Calibri" pitchFamily="34" charset="0"/>
-                <a:ea typeface="Calibri" pitchFamily="34" charset="-122"/>
-                <a:cs typeface="Calibri" pitchFamily="34" charset="-120"/>
-              </a:rPr>
-              <a:t>Interested in graph learning, LLMs or Bayesian modeling? Let’s talk after class.</a:t>
-            </a:r>
-            <a:endParaRPr lang="en-US" sz="1300" dirty="0"/>
-          </a:p>
-        </p:txBody>
-      </p:sp>
-      <p:sp>
-        <p:nvSpPr>
           <p:cNvPr id="6" name="Text 4"/>
           <p:cNvSpPr txBox="1"/>
           <p:nvPr/>
@@ -6730,7 +6387,7 @@
           <a:bodyPr wrap="square" lIns="0" tIns="0" rIns="0" bIns="0" rtlCol="0" anchor="ctr"/>
           <a:lstStyle/>
           <a:p>
-            <a:pPr indent="0" marL="0">
+            <a:pPr marL="0" indent="0">
               <a:buNone/>
             </a:pPr>
             <a:r>
@@ -6769,7 +6426,7 @@
           <a:bodyPr wrap="square" lIns="0" tIns="0" rIns="0" bIns="0" rtlCol="0" anchor="ctr"/>
           <a:lstStyle/>
           <a:p>
-            <a:pPr algn="r" indent="0" marL="0">
+            <a:pPr marL="0" indent="0" algn="r">
               <a:buNone/>
             </a:pPr>
             <a:r>
@@ -7088,4 +6745,319 @@
     </a:ext>
   </a:extLst>
 </a:theme>
+</file>
+
+<file path=ppt/theme/theme2.xml><?xml version="1.0" encoding="utf-8"?>
+<a:theme xmlns:a="http://schemas.openxmlformats.org/drawingml/2006/main" name="Office Theme">
+  <a:themeElements>
+    <a:clrScheme name="Office">
+      <a:dk1>
+        <a:sysClr val="windowText" lastClr="000000"/>
+      </a:dk1>
+      <a:lt1>
+        <a:sysClr val="window" lastClr="FFFFFF"/>
+      </a:lt1>
+      <a:dk2>
+        <a:srgbClr val="0E2841"/>
+      </a:dk2>
+      <a:lt2>
+        <a:srgbClr val="E8E8E8"/>
+      </a:lt2>
+      <a:accent1>
+        <a:srgbClr val="156082"/>
+      </a:accent1>
+      <a:accent2>
+        <a:srgbClr val="E97132"/>
+      </a:accent2>
+      <a:accent3>
+        <a:srgbClr val="196B24"/>
+      </a:accent3>
+      <a:accent4>
+        <a:srgbClr val="0F9ED5"/>
+      </a:accent4>
+      <a:accent5>
+        <a:srgbClr val="A02B93"/>
+      </a:accent5>
+      <a:accent6>
+        <a:srgbClr val="4EA72E"/>
+      </a:accent6>
+      <a:hlink>
+        <a:srgbClr val="467886"/>
+      </a:hlink>
+      <a:folHlink>
+        <a:srgbClr val="96607D"/>
+      </a:folHlink>
+    </a:clrScheme>
+    <a:fontScheme name="Office">
+      <a:majorFont>
+        <a:latin typeface="Aptos Display" panose="02110004020202020204"/>
+        <a:ea typeface=""/>
+        <a:cs typeface=""/>
+        <a:font script="Jpan" typeface="游ゴシック Light"/>
+        <a:font script="Hang" typeface="맑은 고딕"/>
+        <a:font script="Hans" typeface="等线 Light"/>
+        <a:font script="Hant" typeface="新細明體"/>
+        <a:font script="Arab" typeface="Times New Roman"/>
+        <a:font script="Hebr" typeface="Times New Roman"/>
+        <a:font script="Thai" typeface="Angsana New"/>
+        <a:font script="Ethi" typeface="Nyala"/>
+        <a:font script="Beng" typeface="Vrinda"/>
+        <a:font script="Gujr" typeface="Shruti"/>
+        <a:font script="Khmr" typeface="MoolBoran"/>
+        <a:font script="Knda" typeface="Tunga"/>
+        <a:font script="Guru" typeface="Raavi"/>
+        <a:font script="Cans" typeface="Euphemia"/>
+        <a:font script="Cher" typeface="Plantagenet Cherokee"/>
+        <a:font script="Yiii" typeface="Microsoft Yi Baiti"/>
+        <a:font script="Tibt" typeface="Microsoft Himalaya"/>
+        <a:font script="Thaa" typeface="MV Boli"/>
+        <a:font script="Deva" typeface="Mangal"/>
+        <a:font script="Telu" typeface="Gautami"/>
+        <a:font script="Taml" typeface="Latha"/>
+        <a:font script="Syrc" typeface="Estrangelo Edessa"/>
+        <a:font script="Orya" typeface="Kalinga"/>
+        <a:font script="Mlym" typeface="Kartika"/>
+        <a:font script="Laoo" typeface="DokChampa"/>
+        <a:font script="Sinh" typeface="Iskoola Pota"/>
+        <a:font script="Mong" typeface="Mongolian Baiti"/>
+        <a:font script="Viet" typeface="Times New Roman"/>
+        <a:font script="Uigh" typeface="Microsoft Uighur"/>
+        <a:font script="Geor" typeface="Sylfaen"/>
+        <a:font script="Armn" typeface="Arial"/>
+        <a:font script="Bugi" typeface="Leelawadee UI"/>
+        <a:font script="Bopo" typeface="Microsoft JhengHei"/>
+        <a:font script="Java" typeface="Javanese Text"/>
+        <a:font script="Lisu" typeface="Segoe UI"/>
+        <a:font script="Mymr" typeface="Myanmar Text"/>
+        <a:font script="Nkoo" typeface="Ebrima"/>
+        <a:font script="Olck" typeface="Nirmala UI"/>
+        <a:font script="Osma" typeface="Ebrima"/>
+        <a:font script="Phag" typeface="Phagspa"/>
+        <a:font script="Syrn" typeface="Estrangelo Edessa"/>
+        <a:font script="Syrj" typeface="Estrangelo Edessa"/>
+        <a:font script="Syre" typeface="Estrangelo Edessa"/>
+        <a:font script="Sora" typeface="Nirmala UI"/>
+        <a:font script="Tale" typeface="Microsoft Tai Le"/>
+        <a:font script="Talu" typeface="Microsoft New Tai Lue"/>
+        <a:font script="Tfng" typeface="Ebrima"/>
+      </a:majorFont>
+      <a:minorFont>
+        <a:latin typeface="Aptos" panose="02110004020202020204"/>
+        <a:ea typeface=""/>
+        <a:cs typeface=""/>
+        <a:font script="Jpan" typeface="游ゴシック"/>
+        <a:font script="Hang" typeface="맑은 고딕"/>
+        <a:font script="Hans" typeface="等线"/>
+        <a:font script="Hant" typeface="新細明體"/>
+        <a:font script="Arab" typeface="Arial"/>
+        <a:font script="Hebr" typeface="Arial"/>
+        <a:font script="Thai" typeface="Cordia New"/>
+        <a:font script="Ethi" typeface="Nyala"/>
+        <a:font script="Beng" typeface="Vrinda"/>
+        <a:font script="Gujr" typeface="Shruti"/>
+        <a:font script="Khmr" typeface="DaunPenh"/>
+        <a:font script="Knda" typeface="Tunga"/>
+        <a:font script="Guru" typeface="Raavi"/>
+        <a:font script="Cans" typeface="Euphemia"/>
+        <a:font script="Cher" typeface="Plantagenet Cherokee"/>
+        <a:font script="Yiii" typeface="Microsoft Yi Baiti"/>
+        <a:font script="Tibt" typeface="Microsoft Himalaya"/>
+        <a:font script="Thaa" typeface="MV Boli"/>
+        <a:font script="Deva" typeface="Mangal"/>
+        <a:font script="Telu" typeface="Gautami"/>
+        <a:font script="Taml" typeface="Latha"/>
+        <a:font script="Syrc" typeface="Estrangelo Edessa"/>
+        <a:font script="Orya" typeface="Kalinga"/>
+        <a:font script="Mlym" typeface="Kartika"/>
+        <a:font script="Laoo" typeface="DokChampa"/>
+        <a:font script="Sinh" typeface="Iskoola Pota"/>
+        <a:font script="Mong" typeface="Mongolian Baiti"/>
+        <a:font script="Viet" typeface="Arial"/>
+        <a:font script="Uigh" typeface="Microsoft Uighur"/>
+        <a:font script="Geor" typeface="Sylfaen"/>
+        <a:font script="Armn" typeface="Arial"/>
+        <a:font script="Bugi" typeface="Leelawadee UI"/>
+        <a:font script="Bopo" typeface="Microsoft JhengHei"/>
+        <a:font script="Java" typeface="Javanese Text"/>
+        <a:font script="Lisu" typeface="Segoe UI"/>
+        <a:font script="Mymr" typeface="Myanmar Text"/>
+        <a:font script="Nkoo" typeface="Ebrima"/>
+        <a:font script="Olck" typeface="Nirmala UI"/>
+        <a:font script="Osma" typeface="Ebrima"/>
+        <a:font script="Phag" typeface="Phagspa"/>
+        <a:font script="Syrn" typeface="Estrangelo Edessa"/>
+        <a:font script="Syrj" typeface="Estrangelo Edessa"/>
+        <a:font script="Syre" typeface="Estrangelo Edessa"/>
+        <a:font script="Sora" typeface="Nirmala UI"/>
+        <a:font script="Tale" typeface="Microsoft Tai Le"/>
+        <a:font script="Talu" typeface="Microsoft New Tai Lue"/>
+        <a:font script="Tfng" typeface="Ebrima"/>
+      </a:minorFont>
+    </a:fontScheme>
+    <a:fmtScheme name="Office">
+      <a:fillStyleLst>
+        <a:solidFill>
+          <a:schemeClr val="phClr"/>
+        </a:solidFill>
+        <a:gradFill rotWithShape="1">
+          <a:gsLst>
+            <a:gs pos="0">
+              <a:schemeClr val="phClr">
+                <a:lumMod val="110000"/>
+                <a:satMod val="105000"/>
+                <a:tint val="67000"/>
+              </a:schemeClr>
+            </a:gs>
+            <a:gs pos="50000">
+              <a:schemeClr val="phClr">
+                <a:lumMod val="105000"/>
+                <a:satMod val="103000"/>
+                <a:tint val="73000"/>
+              </a:schemeClr>
+            </a:gs>
+            <a:gs pos="100000">
+              <a:schemeClr val="phClr">
+                <a:lumMod val="105000"/>
+                <a:satMod val="109000"/>
+                <a:tint val="81000"/>
+              </a:schemeClr>
+            </a:gs>
+          </a:gsLst>
+          <a:lin ang="5400000" scaled="0"/>
+        </a:gradFill>
+        <a:gradFill rotWithShape="1">
+          <a:gsLst>
+            <a:gs pos="0">
+              <a:schemeClr val="phClr">
+                <a:satMod val="103000"/>
+                <a:lumMod val="102000"/>
+                <a:tint val="94000"/>
+              </a:schemeClr>
+            </a:gs>
+            <a:gs pos="50000">
+              <a:schemeClr val="phClr">
+                <a:satMod val="110000"/>
+                <a:lumMod val="100000"/>
+                <a:shade val="100000"/>
+              </a:schemeClr>
+            </a:gs>
+            <a:gs pos="100000">
+              <a:schemeClr val="phClr">
+                <a:lumMod val="99000"/>
+                <a:satMod val="120000"/>
+                <a:shade val="78000"/>
+              </a:schemeClr>
+            </a:gs>
+          </a:gsLst>
+          <a:lin ang="5400000" scaled="0"/>
+        </a:gradFill>
+      </a:fillStyleLst>
+      <a:lnStyleLst>
+        <a:ln w="12700" cap="flat" cmpd="sng" algn="ctr">
+          <a:solidFill>
+            <a:schemeClr val="phClr"/>
+          </a:solidFill>
+          <a:prstDash val="solid"/>
+          <a:miter lim="800000"/>
+        </a:ln>
+        <a:ln w="19050" cap="flat" cmpd="sng" algn="ctr">
+          <a:solidFill>
+            <a:schemeClr val="phClr"/>
+          </a:solidFill>
+          <a:prstDash val="solid"/>
+          <a:miter lim="800000"/>
+        </a:ln>
+        <a:ln w="25400" cap="flat" cmpd="sng" algn="ctr">
+          <a:solidFill>
+            <a:schemeClr val="phClr"/>
+          </a:solidFill>
+          <a:prstDash val="solid"/>
+          <a:miter lim="800000"/>
+        </a:ln>
+      </a:lnStyleLst>
+      <a:effectStyleLst>
+        <a:effectStyle>
+          <a:effectLst/>
+        </a:effectStyle>
+        <a:effectStyle>
+          <a:effectLst/>
+        </a:effectStyle>
+        <a:effectStyle>
+          <a:effectLst>
+            <a:outerShdw blurRad="57150" dist="19050" dir="5400000" algn="ctr" rotWithShape="0">
+              <a:srgbClr val="000000">
+                <a:alpha val="63000"/>
+              </a:srgbClr>
+            </a:outerShdw>
+          </a:effectLst>
+        </a:effectStyle>
+      </a:effectStyleLst>
+      <a:bgFillStyleLst>
+        <a:solidFill>
+          <a:schemeClr val="phClr"/>
+        </a:solidFill>
+        <a:solidFill>
+          <a:schemeClr val="phClr">
+            <a:tint val="95000"/>
+            <a:satMod val="170000"/>
+          </a:schemeClr>
+        </a:solidFill>
+        <a:gradFill rotWithShape="1">
+          <a:gsLst>
+            <a:gs pos="0">
+              <a:schemeClr val="phClr">
+                <a:tint val="93000"/>
+                <a:satMod val="150000"/>
+                <a:shade val="98000"/>
+                <a:lumMod val="102000"/>
+              </a:schemeClr>
+            </a:gs>
+            <a:gs pos="50000">
+              <a:schemeClr val="phClr">
+                <a:tint val="98000"/>
+                <a:satMod val="130000"/>
+                <a:shade val="90000"/>
+                <a:lumMod val="103000"/>
+              </a:schemeClr>
+            </a:gs>
+            <a:gs pos="100000">
+              <a:schemeClr val="phClr">
+                <a:shade val="63000"/>
+                <a:satMod val="120000"/>
+              </a:schemeClr>
+            </a:gs>
+          </a:gsLst>
+          <a:lin ang="5400000" scaled="0"/>
+        </a:gradFill>
+      </a:bgFillStyleLst>
+    </a:fmtScheme>
+  </a:themeElements>
+  <a:objectDefaults>
+    <a:lnDef>
+      <a:spPr/>
+      <a:bodyPr/>
+      <a:lstStyle/>
+      <a:style>
+        <a:lnRef idx="2">
+          <a:schemeClr val="accent1"/>
+        </a:lnRef>
+        <a:fillRef idx="0">
+          <a:schemeClr val="accent1"/>
+        </a:fillRef>
+        <a:effectRef idx="1">
+          <a:schemeClr val="accent1"/>
+        </a:effectRef>
+        <a:fontRef idx="minor">
+          <a:schemeClr val="tx1"/>
+        </a:fontRef>
+      </a:style>
+    </a:lnDef>
+  </a:objectDefaults>
+  <a:extraClrSchemeLst/>
+  <a:extLst>
+    <a:ext uri="{05A4C25C-085E-4340-85A3-A5531E510DB2}">
+      <thm15:themeFamily xmlns:thm15="http://schemas.microsoft.com/office/thememl/2012/main" name="Office Theme" id="{2E142A2C-CD16-42D6-873A-C26D2A0506FA}" vid="{1BDDFF52-6CD6-40A5-AB3C-68EB2F1E4D0A}"/>
+    </a:ext>
+  </a:extLst>
+</a:theme>
 </file>